--- a/public/lessons/year-6-maths/summer/week-23/convert-metric-lengths/teaching-powerpoint-v1.pptx
+++ b/public/lessons/year-6-maths/summer/week-23/convert-metric-lengths/teaching-powerpoint-v1.pptx
@@ -2,24 +2,24 @@
 <file path=ppt/presentation.xml><?xml version="1.0" encoding="utf-8"?>
 <p:presentation xmlns:p="http://schemas.openxmlformats.org/presentationml/2006/main">
   <p:sldMasterIdLst>
-    <p:sldMasterId xmlns:r="http://schemas.openxmlformats.org/officeDocument/2006/relationships" id="2147483648" r:id="R628929c7b6684029"/>
+    <p:sldMasterId xmlns:r="http://schemas.openxmlformats.org/officeDocument/2006/relationships" id="2147483648" r:id="R9f4b7e7f465d4b4b"/>
   </p:sldMasterIdLst>
   <p:notesMasterIdLst>
-    <p:notesMasterId xmlns:r="http://schemas.openxmlformats.org/officeDocument/2006/relationships" r:id="R95beebbf85d44369"/>
+    <p:notesMasterId xmlns:r="http://schemas.openxmlformats.org/officeDocument/2006/relationships" r:id="R824019f01d7149cd"/>
   </p:notesMasterIdLst>
   <p:sldIdLst>
-    <p:sldId xmlns:r="http://schemas.openxmlformats.org/officeDocument/2006/relationships" id="256" r:id="R760035e0deed475f"/>
-    <p:sldId xmlns:r="http://schemas.openxmlformats.org/officeDocument/2006/relationships" id="257" r:id="R6a439c793b6842f9"/>
-    <p:sldId xmlns:r="http://schemas.openxmlformats.org/officeDocument/2006/relationships" id="258" r:id="R7be4250bacb84946"/>
-    <p:sldId xmlns:r="http://schemas.openxmlformats.org/officeDocument/2006/relationships" id="259" r:id="Rcaed3a2d66614b03"/>
-    <p:sldId xmlns:r="http://schemas.openxmlformats.org/officeDocument/2006/relationships" id="260" r:id="R9e6143c38f6d454f"/>
-    <p:sldId xmlns:r="http://schemas.openxmlformats.org/officeDocument/2006/relationships" id="261" r:id="R7707875cd0e54034"/>
-    <p:sldId xmlns:r="http://schemas.openxmlformats.org/officeDocument/2006/relationships" id="262" r:id="Ra8f1ccbe94f14fd6"/>
-    <p:sldId xmlns:r="http://schemas.openxmlformats.org/officeDocument/2006/relationships" id="263" r:id="Rd1d98b9a3a3a4764"/>
-    <p:sldId xmlns:r="http://schemas.openxmlformats.org/officeDocument/2006/relationships" id="264" r:id="R8abdb2f1a87d4cf2"/>
-    <p:sldId xmlns:r="http://schemas.openxmlformats.org/officeDocument/2006/relationships" id="265" r:id="R6f055899b23e4ab0"/>
-    <p:sldId xmlns:r="http://schemas.openxmlformats.org/officeDocument/2006/relationships" id="266" r:id="R76ad7d59325c4ba4"/>
-    <p:sldId xmlns:r="http://schemas.openxmlformats.org/officeDocument/2006/relationships" id="267" r:id="Rb900ca0544014306"/>
+    <p:sldId xmlns:r="http://schemas.openxmlformats.org/officeDocument/2006/relationships" id="256" r:id="Rf006839251be42af"/>
+    <p:sldId xmlns:r="http://schemas.openxmlformats.org/officeDocument/2006/relationships" id="257" r:id="Rdd2f65115a544950"/>
+    <p:sldId xmlns:r="http://schemas.openxmlformats.org/officeDocument/2006/relationships" id="258" r:id="R20018ee7b5444cd5"/>
+    <p:sldId xmlns:r="http://schemas.openxmlformats.org/officeDocument/2006/relationships" id="259" r:id="R0666f7126c1548b2"/>
+    <p:sldId xmlns:r="http://schemas.openxmlformats.org/officeDocument/2006/relationships" id="260" r:id="Rd9af10e384a24b8d"/>
+    <p:sldId xmlns:r="http://schemas.openxmlformats.org/officeDocument/2006/relationships" id="261" r:id="R1b1472a53688433c"/>
+    <p:sldId xmlns:r="http://schemas.openxmlformats.org/officeDocument/2006/relationships" id="262" r:id="R661df46fe2fc4bf1"/>
+    <p:sldId xmlns:r="http://schemas.openxmlformats.org/officeDocument/2006/relationships" id="263" r:id="R7d19695b0cbc42a4"/>
+    <p:sldId xmlns:r="http://schemas.openxmlformats.org/officeDocument/2006/relationships" id="264" r:id="R48758c5cd0ec4ce4"/>
+    <p:sldId xmlns:r="http://schemas.openxmlformats.org/officeDocument/2006/relationships" id="265" r:id="R41b3b8c767ed446d"/>
+    <p:sldId xmlns:r="http://schemas.openxmlformats.org/officeDocument/2006/relationships" id="266" r:id="Rd9dd5472f474488c"/>
+    <p:sldId xmlns:r="http://schemas.openxmlformats.org/officeDocument/2006/relationships" id="267" r:id="R3799cdcf9410412e"/>
   </p:sldIdLst>
   <p:sldSz cx="12192000" cy="6858000"/>
   <p:notesSz cx="6858000" cy="9144000"/>
@@ -873,7 +873,7 @@
           <a:lstStyle xmlns:a="http://schemas.openxmlformats.org/drawingml/2006/main"/>
           <a:p xmlns:a="http://schemas.openxmlformats.org/drawingml/2006/main">
             <a:r>
-              <a:t>I do. Reveal the question, setup and each calculation stage one click at a time. Pupils watch before copying. Model answer: 4,375 m.</a:t>
+              <a:t>I do. Reveal the question, then reveal each mathematical change one click at a time. Point to the numbers and operation that changed before moving to the next line. Final answer: 4,375 m.</a:t>
             </a:r>
           </a:p>
         </p:txBody>
@@ -1291,7 +1291,7 @@
   </p:cSld>
   <p:clrMap bg1="lt1" tx1="dk1" bg2="lt2" tx2="dk2" accent1="accent1" accent2="accent2" accent3="accent3" accent4="accent4" accent5="accent5" accent6="accent6" hlink="hlink" folHlink="folHlink"/>
   <p:sldLayoutIdLst>
-    <p:sldLayoutId xmlns:r="http://schemas.openxmlformats.org/officeDocument/2006/relationships" id="2147483649" r:id="R9d48b207591c459d"/>
+    <p:sldLayoutId xmlns:r="http://schemas.openxmlformats.org/officeDocument/2006/relationships" id="2147483649" r:id="Rfa41298a6ea046f6"/>
   </p:sldLayoutIdLst>
   <p:txStyles>
     <p:titleStyle>
@@ -1842,7 +1842,7 @@
           <p:cNvPr id="12" name="">
             <a:extLst xmlns:a="http://schemas.openxmlformats.org/drawingml/2006/main">
               <a:ext uri="{FF2B5EF4-FFF2-40B4-BE49-F238E27FC236}">
-                <a16:creationId xmlns:a16="http://schemas.microsoft.com/office/drawing/2014/main" id="{B2A7D0AA-51E9-4536-9D50-2EC9BDB173B2}"/>
+                <a16:creationId xmlns:a16="http://schemas.microsoft.com/office/drawing/2014/main" id="{540F10CF-5A0F-434F-99BE-EF68A5BC9171}"/>
               </a:ext>
             </a:extLst>
           </p:cNvPr>
@@ -1874,7 +1874,7 @@
           <p:cNvPr id="2" name="">
             <a:extLst xmlns:a="http://schemas.openxmlformats.org/drawingml/2006/main">
               <a:ext uri="{FF2B5EF4-FFF2-40B4-BE49-F238E27FC236}">
-                <a16:creationId xmlns:a16="http://schemas.microsoft.com/office/drawing/2014/main" id="{D1840CF4-3837-4BEB-8776-D58D7303B549}"/>
+                <a16:creationId xmlns:a16="http://schemas.microsoft.com/office/drawing/2014/main" id="{6E56B786-25D7-4009-9D26-8A7AA7CA6055}"/>
               </a:ext>
             </a:extLst>
           </p:cNvPr>
@@ -1931,7 +1931,7 @@
           <p:cNvPr id="3" name="">
             <a:extLst xmlns:a="http://schemas.openxmlformats.org/drawingml/2006/main">
               <a:ext uri="{FF2B5EF4-FFF2-40B4-BE49-F238E27FC236}">
-                <a16:creationId xmlns:a16="http://schemas.microsoft.com/office/drawing/2014/main" id="{BE258BF4-88C3-4B08-9E5B-957849655AB9}"/>
+                <a16:creationId xmlns:a16="http://schemas.microsoft.com/office/drawing/2014/main" id="{52AB3211-DA81-48DF-B697-86704687228B}"/>
               </a:ext>
             </a:extLst>
           </p:cNvPr>
@@ -1965,7 +1965,7 @@
           <p:cNvPr id="4" name="">
             <a:extLst xmlns:a="http://schemas.openxmlformats.org/drawingml/2006/main">
               <a:ext uri="{FF2B5EF4-FFF2-40B4-BE49-F238E27FC236}">
-                <a16:creationId xmlns:a16="http://schemas.microsoft.com/office/drawing/2014/main" id="{843D5F1F-78BB-4D35-B99C-15F9E2EECC11}"/>
+                <a16:creationId xmlns:a16="http://schemas.microsoft.com/office/drawing/2014/main" id="{94633A61-1B12-4C24-9B0A-FEB74559C636}"/>
               </a:ext>
             </a:extLst>
           </p:cNvPr>
@@ -2022,7 +2022,7 @@
           <p:cNvPr id="5" name="">
             <a:extLst xmlns:a="http://schemas.openxmlformats.org/drawingml/2006/main">
               <a:ext uri="{FF2B5EF4-FFF2-40B4-BE49-F238E27FC236}">
-                <a16:creationId xmlns:a16="http://schemas.microsoft.com/office/drawing/2014/main" id="{59B7270C-9C18-4B25-B8A6-0623315B6691}"/>
+                <a16:creationId xmlns:a16="http://schemas.microsoft.com/office/drawing/2014/main" id="{106456BA-B7FC-4F10-8162-E4F815A6006C}"/>
               </a:ext>
             </a:extLst>
           </p:cNvPr>
@@ -2079,7 +2079,7 @@
           <p:cNvPr id="6" name="">
             <a:extLst xmlns:a="http://schemas.openxmlformats.org/drawingml/2006/main">
               <a:ext uri="{FF2B5EF4-FFF2-40B4-BE49-F238E27FC236}">
-                <a16:creationId xmlns:a16="http://schemas.microsoft.com/office/drawing/2014/main" id="{5EC32BD6-95A6-4BA9-87FF-5DCE5A38026F}"/>
+                <a16:creationId xmlns:a16="http://schemas.microsoft.com/office/drawing/2014/main" id="{38A364AB-7C00-4FA0-8A40-D737CFCFDD67}"/>
               </a:ext>
             </a:extLst>
           </p:cNvPr>
@@ -2113,7 +2113,7 @@
           <p:cNvPr id="7" name="">
             <a:extLst xmlns:a="http://schemas.openxmlformats.org/drawingml/2006/main">
               <a:ext uri="{FF2B5EF4-FFF2-40B4-BE49-F238E27FC236}">
-                <a16:creationId xmlns:a16="http://schemas.microsoft.com/office/drawing/2014/main" id="{EF496835-C372-419B-B55A-A9A3BE1A0C18}"/>
+                <a16:creationId xmlns:a16="http://schemas.microsoft.com/office/drawing/2014/main" id="{12052303-11EF-4ECA-9D16-429A6AEF5F2F}"/>
               </a:ext>
             </a:extLst>
           </p:cNvPr>
@@ -2170,7 +2170,7 @@
           <p:cNvPr id="8" name="">
             <a:extLst xmlns:a="http://schemas.openxmlformats.org/drawingml/2006/main">
               <a:ext uri="{FF2B5EF4-FFF2-40B4-BE49-F238E27FC236}">
-                <a16:creationId xmlns:a16="http://schemas.microsoft.com/office/drawing/2014/main" id="{79B2204C-D0DB-4805-8F71-132E5A8B56A0}"/>
+                <a16:creationId xmlns:a16="http://schemas.microsoft.com/office/drawing/2014/main" id="{246C00E6-E7F2-4417-8D0C-238C4630C2B7}"/>
               </a:ext>
             </a:extLst>
           </p:cNvPr>
@@ -2227,7 +2227,7 @@
           <p:cNvPr id="9" name="">
             <a:extLst xmlns:a="http://schemas.openxmlformats.org/drawingml/2006/main">
               <a:ext uri="{FF2B5EF4-FFF2-40B4-BE49-F238E27FC236}">
-                <a16:creationId xmlns:a16="http://schemas.microsoft.com/office/drawing/2014/main" id="{CEB93BC9-3B19-4D04-95FF-F96A632545B7}"/>
+                <a16:creationId xmlns:a16="http://schemas.microsoft.com/office/drawing/2014/main" id="{43917C62-CB25-49EF-B59C-556997D18B54}"/>
               </a:ext>
             </a:extLst>
           </p:cNvPr>
@@ -2284,7 +2284,7 @@
           <p:cNvPr id="10" name="">
             <a:extLst xmlns:a="http://schemas.openxmlformats.org/drawingml/2006/main">
               <a:ext uri="{FF2B5EF4-FFF2-40B4-BE49-F238E27FC236}">
-                <a16:creationId xmlns:a16="http://schemas.microsoft.com/office/drawing/2014/main" id="{2A8F3884-7F91-48F7-B1BF-5CA8ED96E05D}"/>
+                <a16:creationId xmlns:a16="http://schemas.microsoft.com/office/drawing/2014/main" id="{33F97EB2-CE44-4B65-B394-067E2E67AA24}"/>
               </a:ext>
             </a:extLst>
           </p:cNvPr>
@@ -2341,7 +2341,7 @@
           <p:cNvPr id="11" name="">
             <a:extLst xmlns:a="http://schemas.openxmlformats.org/drawingml/2006/main">
               <a:ext uri="{FF2B5EF4-FFF2-40B4-BE49-F238E27FC236}">
-                <a16:creationId xmlns:a16="http://schemas.microsoft.com/office/drawing/2014/main" id="{8C6EB3DB-1CA8-4E50-B717-F3E245487EDE}"/>
+                <a16:creationId xmlns:a16="http://schemas.microsoft.com/office/drawing/2014/main" id="{3B7ECA2D-E802-4F53-8E31-0CCD621ADE53}"/>
               </a:ext>
             </a:extLst>
           </p:cNvPr>
@@ -2396,7 +2396,7 @@
     </p:spTree>
     <p:extLst>
       <p:ext uri="{BB962C8B-B14F-4D97-AF65-F5344CB8AC3E}">
-        <p14:creationId xmlns:p14="http://schemas.microsoft.com/office/powerpoint/2010/main" val="2047079980"/>
+        <p14:creationId xmlns:p14="http://schemas.microsoft.com/office/powerpoint/2010/main" val="1944330913"/>
       </p:ext>
     </p:extLst>
   </p:cSld>
@@ -2427,7 +2427,7 @@
           <p:cNvPr id="14" name="">
             <a:extLst xmlns:a="http://schemas.openxmlformats.org/drawingml/2006/main">
               <a:ext uri="{FF2B5EF4-FFF2-40B4-BE49-F238E27FC236}">
-                <a16:creationId xmlns:a16="http://schemas.microsoft.com/office/drawing/2014/main" id="{69DA9FD4-28AC-42C0-89EC-78DBC63C9E63}"/>
+                <a16:creationId xmlns:a16="http://schemas.microsoft.com/office/drawing/2014/main" id="{424898EC-8791-4E3B-9064-2AFA416663F5}"/>
               </a:ext>
             </a:extLst>
           </p:cNvPr>
@@ -2459,7 +2459,7 @@
           <p:cNvPr id="2" name="">
             <a:extLst xmlns:a="http://schemas.openxmlformats.org/drawingml/2006/main">
               <a:ext uri="{FF2B5EF4-FFF2-40B4-BE49-F238E27FC236}">
-                <a16:creationId xmlns:a16="http://schemas.microsoft.com/office/drawing/2014/main" id="{E7121C01-FAFB-470E-A281-ABF492F92DFA}"/>
+                <a16:creationId xmlns:a16="http://schemas.microsoft.com/office/drawing/2014/main" id="{06DCAB07-27D3-46FB-B981-E8EF6AC37D3B}"/>
               </a:ext>
             </a:extLst>
           </p:cNvPr>
@@ -2516,7 +2516,7 @@
           <p:cNvPr id="3" name="">
             <a:extLst xmlns:a="http://schemas.openxmlformats.org/drawingml/2006/main">
               <a:ext uri="{FF2B5EF4-FFF2-40B4-BE49-F238E27FC236}">
-                <a16:creationId xmlns:a16="http://schemas.microsoft.com/office/drawing/2014/main" id="{5F0B505C-CF34-4268-B42D-D18054DA56D1}"/>
+                <a16:creationId xmlns:a16="http://schemas.microsoft.com/office/drawing/2014/main" id="{5630D3C4-12E0-46EF-9A3C-6587E5439419}"/>
               </a:ext>
             </a:extLst>
           </p:cNvPr>
@@ -2548,7 +2548,7 @@
           <p:cNvPr id="4" name="">
             <a:extLst xmlns:a="http://schemas.openxmlformats.org/drawingml/2006/main">
               <a:ext uri="{FF2B5EF4-FFF2-40B4-BE49-F238E27FC236}">
-                <a16:creationId xmlns:a16="http://schemas.microsoft.com/office/drawing/2014/main" id="{A37CEC67-57A3-47AA-BFD7-E85F9767B609}"/>
+                <a16:creationId xmlns:a16="http://schemas.microsoft.com/office/drawing/2014/main" id="{D6B47F28-7A4F-4681-9785-285C65C048B9}"/>
               </a:ext>
             </a:extLst>
           </p:cNvPr>
@@ -2605,7 +2605,7 @@
           <p:cNvPr id="5" name="">
             <a:extLst xmlns:a="http://schemas.openxmlformats.org/drawingml/2006/main">
               <a:ext uri="{FF2B5EF4-FFF2-40B4-BE49-F238E27FC236}">
-                <a16:creationId xmlns:a16="http://schemas.microsoft.com/office/drawing/2014/main" id="{50689269-90DD-417C-A689-921CEAC753D7}"/>
+                <a16:creationId xmlns:a16="http://schemas.microsoft.com/office/drawing/2014/main" id="{E34DFCA0-6671-47E6-8B33-85E63CAFF0E7}"/>
               </a:ext>
             </a:extLst>
           </p:cNvPr>
@@ -2662,7 +2662,7 @@
           <p:cNvPr id="6" name="">
             <a:extLst xmlns:a="http://schemas.openxmlformats.org/drawingml/2006/main">
               <a:ext uri="{FF2B5EF4-FFF2-40B4-BE49-F238E27FC236}">
-                <a16:creationId xmlns:a16="http://schemas.microsoft.com/office/drawing/2014/main" id="{9E02491F-3944-4A56-A632-D40E379837CC}"/>
+                <a16:creationId xmlns:a16="http://schemas.microsoft.com/office/drawing/2014/main" id="{17D335B6-ECB7-46C6-A0C7-DD0D91B8029A}"/>
               </a:ext>
             </a:extLst>
           </p:cNvPr>
@@ -2719,7 +2719,7 @@
           <p:cNvPr id="7" name="">
             <a:extLst xmlns:a="http://schemas.openxmlformats.org/drawingml/2006/main">
               <a:ext uri="{FF2B5EF4-FFF2-40B4-BE49-F238E27FC236}">
-                <a16:creationId xmlns:a16="http://schemas.microsoft.com/office/drawing/2014/main" id="{0ACA0CA2-71C8-4A55-9192-1CC2E3BD74AF}"/>
+                <a16:creationId xmlns:a16="http://schemas.microsoft.com/office/drawing/2014/main" id="{D5329174-2C93-4E8D-9DE6-A8DCBE27151F}"/>
               </a:ext>
             </a:extLst>
           </p:cNvPr>
@@ -2751,7 +2751,7 @@
           <p:cNvPr id="8" name="">
             <a:extLst xmlns:a="http://schemas.openxmlformats.org/drawingml/2006/main">
               <a:ext uri="{FF2B5EF4-FFF2-40B4-BE49-F238E27FC236}">
-                <a16:creationId xmlns:a16="http://schemas.microsoft.com/office/drawing/2014/main" id="{D1868C7F-A96F-4B48-80EA-3554680545C3}"/>
+                <a16:creationId xmlns:a16="http://schemas.microsoft.com/office/drawing/2014/main" id="{EEE3939A-0954-452D-AB32-CD0FB9B58C1E}"/>
               </a:ext>
             </a:extLst>
           </p:cNvPr>
@@ -2808,7 +2808,7 @@
           <p:cNvPr id="9" name="">
             <a:extLst xmlns:a="http://schemas.openxmlformats.org/drawingml/2006/main">
               <a:ext uri="{FF2B5EF4-FFF2-40B4-BE49-F238E27FC236}">
-                <a16:creationId xmlns:a16="http://schemas.microsoft.com/office/drawing/2014/main" id="{83E8D11B-8C88-4418-A0EE-53F279266CA2}"/>
+                <a16:creationId xmlns:a16="http://schemas.microsoft.com/office/drawing/2014/main" id="{9A1D2FB6-AEAD-4648-80FB-79B35CE52CE6}"/>
               </a:ext>
             </a:extLst>
           </p:cNvPr>
@@ -2865,7 +2865,7 @@
           <p:cNvPr id="10" name="">
             <a:extLst xmlns:a="http://schemas.openxmlformats.org/drawingml/2006/main">
               <a:ext uri="{FF2B5EF4-FFF2-40B4-BE49-F238E27FC236}">
-                <a16:creationId xmlns:a16="http://schemas.microsoft.com/office/drawing/2014/main" id="{CCBF611F-2AF8-443D-9674-842FABC5EBFA}"/>
+                <a16:creationId xmlns:a16="http://schemas.microsoft.com/office/drawing/2014/main" id="{E53318D2-5AD3-4F0B-B381-A759384CE0E1}"/>
               </a:ext>
             </a:extLst>
           </p:cNvPr>
@@ -2922,7 +2922,7 @@
           <p:cNvPr id="11" name="">
             <a:extLst xmlns:a="http://schemas.openxmlformats.org/drawingml/2006/main">
               <a:ext uri="{FF2B5EF4-FFF2-40B4-BE49-F238E27FC236}">
-                <a16:creationId xmlns:a16="http://schemas.microsoft.com/office/drawing/2014/main" id="{0A0FE39B-915D-4C91-BDC7-3D27EB601EED}"/>
+                <a16:creationId xmlns:a16="http://schemas.microsoft.com/office/drawing/2014/main" id="{A8611886-EA4C-4B3B-9DF2-877AFAA771EC}"/>
               </a:ext>
             </a:extLst>
           </p:cNvPr>
@@ -2979,7 +2979,7 @@
           <p:cNvPr id="12" name="">
             <a:extLst xmlns:a="http://schemas.openxmlformats.org/drawingml/2006/main">
               <a:ext uri="{FF2B5EF4-FFF2-40B4-BE49-F238E27FC236}">
-                <a16:creationId xmlns:a16="http://schemas.microsoft.com/office/drawing/2014/main" id="{8F9E3138-825C-4DBE-85B2-47BD1CC6C0D0}"/>
+                <a16:creationId xmlns:a16="http://schemas.microsoft.com/office/drawing/2014/main" id="{974DEEAD-A5C5-4666-BC8F-AA354F247EE8}"/>
               </a:ext>
             </a:extLst>
           </p:cNvPr>
@@ -3036,7 +3036,7 @@
           <p:cNvPr id="13" name="">
             <a:extLst xmlns:a="http://schemas.openxmlformats.org/drawingml/2006/main">
               <a:ext uri="{FF2B5EF4-FFF2-40B4-BE49-F238E27FC236}">
-                <a16:creationId xmlns:a16="http://schemas.microsoft.com/office/drawing/2014/main" id="{EDD01CDA-25BA-4E23-AD49-5C36254D5D32}"/>
+                <a16:creationId xmlns:a16="http://schemas.microsoft.com/office/drawing/2014/main" id="{9808618B-A377-48AD-B68F-A660CA4DB999}"/>
               </a:ext>
             </a:extLst>
           </p:cNvPr>
@@ -3091,7 +3091,7 @@
     </p:spTree>
     <p:extLst>
       <p:ext uri="{BB962C8B-B14F-4D97-AF65-F5344CB8AC3E}">
-        <p14:creationId xmlns:p14="http://schemas.microsoft.com/office/powerpoint/2010/main" val="997253076"/>
+        <p14:creationId xmlns:p14="http://schemas.microsoft.com/office/powerpoint/2010/main" val="41235471"/>
       </p:ext>
     </p:extLst>
   </p:cSld>
@@ -3292,7 +3292,7 @@
           <p:cNvPr id="19" name="">
             <a:extLst xmlns:a="http://schemas.openxmlformats.org/drawingml/2006/main">
               <a:ext uri="{FF2B5EF4-FFF2-40B4-BE49-F238E27FC236}">
-                <a16:creationId xmlns:a16="http://schemas.microsoft.com/office/drawing/2014/main" id="{293FAE03-9B71-410B-9ECB-FBDB4199FDA8}"/>
+                <a16:creationId xmlns:a16="http://schemas.microsoft.com/office/drawing/2014/main" id="{E6AABC77-CDD4-4866-9A5F-2927D915E8FE}"/>
               </a:ext>
             </a:extLst>
           </p:cNvPr>
@@ -3324,7 +3324,7 @@
           <p:cNvPr id="2" name="">
             <a:extLst xmlns:a="http://schemas.openxmlformats.org/drawingml/2006/main">
               <a:ext uri="{FF2B5EF4-FFF2-40B4-BE49-F238E27FC236}">
-                <a16:creationId xmlns:a16="http://schemas.microsoft.com/office/drawing/2014/main" id="{596B79BD-458C-4C09-B8EE-B1C0B0349221}"/>
+                <a16:creationId xmlns:a16="http://schemas.microsoft.com/office/drawing/2014/main" id="{E7C65061-6D7D-4E30-B207-AAD2DD23AA2E}"/>
               </a:ext>
             </a:extLst>
           </p:cNvPr>
@@ -3381,7 +3381,7 @@
           <p:cNvPr id="3" name="">
             <a:extLst xmlns:a="http://schemas.openxmlformats.org/drawingml/2006/main">
               <a:ext uri="{FF2B5EF4-FFF2-40B4-BE49-F238E27FC236}">
-                <a16:creationId xmlns:a16="http://schemas.microsoft.com/office/drawing/2014/main" id="{DAEF57C5-70E8-4FA3-9F4B-284D6B745A2C}"/>
+                <a16:creationId xmlns:a16="http://schemas.microsoft.com/office/drawing/2014/main" id="{E464F40F-E1C7-4298-9ED3-69DDD1334813}"/>
               </a:ext>
             </a:extLst>
           </p:cNvPr>
@@ -3413,7 +3413,7 @@
           <p:cNvPr id="4" name="">
             <a:extLst xmlns:a="http://schemas.openxmlformats.org/drawingml/2006/main">
               <a:ext uri="{FF2B5EF4-FFF2-40B4-BE49-F238E27FC236}">
-                <a16:creationId xmlns:a16="http://schemas.microsoft.com/office/drawing/2014/main" id="{D0B97333-4C01-490E-A8D7-EA59FA0FDA56}"/>
+                <a16:creationId xmlns:a16="http://schemas.microsoft.com/office/drawing/2014/main" id="{C3554742-8E66-40A1-B14F-7184A57CA6BF}"/>
               </a:ext>
             </a:extLst>
           </p:cNvPr>
@@ -3470,7 +3470,7 @@
           <p:cNvPr id="5" name="">
             <a:extLst xmlns:a="http://schemas.openxmlformats.org/drawingml/2006/main">
               <a:ext uri="{FF2B5EF4-FFF2-40B4-BE49-F238E27FC236}">
-                <a16:creationId xmlns:a16="http://schemas.microsoft.com/office/drawing/2014/main" id="{2BD5E0D3-1BB0-417F-A37C-EDC5D2D07976}"/>
+                <a16:creationId xmlns:a16="http://schemas.microsoft.com/office/drawing/2014/main" id="{73FABC88-763D-4F14-89B5-4A8C20806009}"/>
               </a:ext>
             </a:extLst>
           </p:cNvPr>
@@ -3527,7 +3527,7 @@
           <p:cNvPr id="6" name="">
             <a:extLst xmlns:a="http://schemas.openxmlformats.org/drawingml/2006/main">
               <a:ext uri="{FF2B5EF4-FFF2-40B4-BE49-F238E27FC236}">
-                <a16:creationId xmlns:a16="http://schemas.microsoft.com/office/drawing/2014/main" id="{D2210272-4DDF-42A4-ADAB-9F407752B9A2}"/>
+                <a16:creationId xmlns:a16="http://schemas.microsoft.com/office/drawing/2014/main" id="{4AE840DA-F957-43A8-A6D1-7707E8FB6998}"/>
               </a:ext>
             </a:extLst>
           </p:cNvPr>
@@ -3584,7 +3584,7 @@
           <p:cNvPr id="7" name="">
             <a:extLst xmlns:a="http://schemas.openxmlformats.org/drawingml/2006/main">
               <a:ext uri="{FF2B5EF4-FFF2-40B4-BE49-F238E27FC236}">
-                <a16:creationId xmlns:a16="http://schemas.microsoft.com/office/drawing/2014/main" id="{0D109660-EF02-491C-9977-F628723F0988}"/>
+                <a16:creationId xmlns:a16="http://schemas.microsoft.com/office/drawing/2014/main" id="{050633F9-BE9B-40AA-8819-7F57CE754F49}"/>
               </a:ext>
             </a:extLst>
           </p:cNvPr>
@@ -3616,7 +3616,7 @@
           <p:cNvPr id="8" name="">
             <a:extLst xmlns:a="http://schemas.openxmlformats.org/drawingml/2006/main">
               <a:ext uri="{FF2B5EF4-FFF2-40B4-BE49-F238E27FC236}">
-                <a16:creationId xmlns:a16="http://schemas.microsoft.com/office/drawing/2014/main" id="{33B4C530-0233-43C2-A9B6-500B70D8495E}"/>
+                <a16:creationId xmlns:a16="http://schemas.microsoft.com/office/drawing/2014/main" id="{572008E6-F9E3-4744-A169-B7DA597E436F}"/>
               </a:ext>
             </a:extLst>
           </p:cNvPr>
@@ -3673,7 +3673,7 @@
           <p:cNvPr id="9" name="">
             <a:extLst xmlns:a="http://schemas.openxmlformats.org/drawingml/2006/main">
               <a:ext uri="{FF2B5EF4-FFF2-40B4-BE49-F238E27FC236}">
-                <a16:creationId xmlns:a16="http://schemas.microsoft.com/office/drawing/2014/main" id="{4D53A3BD-EE5F-4622-895A-22C515C63BBE}"/>
+                <a16:creationId xmlns:a16="http://schemas.microsoft.com/office/drawing/2014/main" id="{64AF3BD4-38FE-4EAD-A7C5-B4864627FE49}"/>
               </a:ext>
             </a:extLst>
           </p:cNvPr>
@@ -3730,7 +3730,7 @@
           <p:cNvPr id="10" name="">
             <a:extLst xmlns:a="http://schemas.openxmlformats.org/drawingml/2006/main">
               <a:ext uri="{FF2B5EF4-FFF2-40B4-BE49-F238E27FC236}">
-                <a16:creationId xmlns:a16="http://schemas.microsoft.com/office/drawing/2014/main" id="{F382A80A-B349-4ACF-81DA-8234D4BCC2E7}"/>
+                <a16:creationId xmlns:a16="http://schemas.microsoft.com/office/drawing/2014/main" id="{BB5CFF3D-A77B-4B8D-ADAA-130D9E429891}"/>
               </a:ext>
             </a:extLst>
           </p:cNvPr>
@@ -3787,7 +3787,7 @@
           <p:cNvPr id="11" name="">
             <a:extLst xmlns:a="http://schemas.openxmlformats.org/drawingml/2006/main">
               <a:ext uri="{FF2B5EF4-FFF2-40B4-BE49-F238E27FC236}">
-                <a16:creationId xmlns:a16="http://schemas.microsoft.com/office/drawing/2014/main" id="{05AB99BD-A847-4AEF-840D-DD36E3D52899}"/>
+                <a16:creationId xmlns:a16="http://schemas.microsoft.com/office/drawing/2014/main" id="{29FFCA72-629B-4F1D-AD6B-04EFD6E24F26}"/>
               </a:ext>
             </a:extLst>
           </p:cNvPr>
@@ -3821,7 +3821,7 @@
           <p:cNvPr id="12" name="">
             <a:extLst xmlns:a="http://schemas.openxmlformats.org/drawingml/2006/main">
               <a:ext uri="{FF2B5EF4-FFF2-40B4-BE49-F238E27FC236}">
-                <a16:creationId xmlns:a16="http://schemas.microsoft.com/office/drawing/2014/main" id="{4975BB38-54B9-4FB3-860D-64A74D59A94B}"/>
+                <a16:creationId xmlns:a16="http://schemas.microsoft.com/office/drawing/2014/main" id="{526A2A26-EC5D-4E87-B56D-8591594C8EFA}"/>
               </a:ext>
             </a:extLst>
           </p:cNvPr>
@@ -3878,7 +3878,7 @@
           <p:cNvPr id="13" name="">
             <a:extLst xmlns:a="http://schemas.openxmlformats.org/drawingml/2006/main">
               <a:ext uri="{FF2B5EF4-FFF2-40B4-BE49-F238E27FC236}">
-                <a16:creationId xmlns:a16="http://schemas.microsoft.com/office/drawing/2014/main" id="{59D6C648-B2D2-457E-ABBC-0BCB619AA263}"/>
+                <a16:creationId xmlns:a16="http://schemas.microsoft.com/office/drawing/2014/main" id="{EB98A24B-89BB-4C68-A1CA-1D0FF8A4B944}"/>
               </a:ext>
             </a:extLst>
           </p:cNvPr>
@@ -3935,7 +3935,7 @@
           <p:cNvPr id="14" name="">
             <a:extLst xmlns:a="http://schemas.openxmlformats.org/drawingml/2006/main">
               <a:ext uri="{FF2B5EF4-FFF2-40B4-BE49-F238E27FC236}">
-                <a16:creationId xmlns:a16="http://schemas.microsoft.com/office/drawing/2014/main" id="{E4FE3ADB-6B3A-43DD-9E36-74F2F64C22AF}"/>
+                <a16:creationId xmlns:a16="http://schemas.microsoft.com/office/drawing/2014/main" id="{9A368287-9CF4-4623-A33F-EF3321490687}"/>
               </a:ext>
             </a:extLst>
           </p:cNvPr>
@@ -3992,7 +3992,7 @@
           <p:cNvPr id="15" name="">
             <a:extLst xmlns:a="http://schemas.openxmlformats.org/drawingml/2006/main">
               <a:ext uri="{FF2B5EF4-FFF2-40B4-BE49-F238E27FC236}">
-                <a16:creationId xmlns:a16="http://schemas.microsoft.com/office/drawing/2014/main" id="{39409539-BD41-499C-95A0-DA62F4F99A02}"/>
+                <a16:creationId xmlns:a16="http://schemas.microsoft.com/office/drawing/2014/main" id="{3AA0685B-6F64-42C1-B35C-3E91D1B4AC7B}"/>
               </a:ext>
             </a:extLst>
           </p:cNvPr>
@@ -4026,7 +4026,7 @@
           <p:cNvPr id="16" name="">
             <a:extLst xmlns:a="http://schemas.openxmlformats.org/drawingml/2006/main">
               <a:ext uri="{FF2B5EF4-FFF2-40B4-BE49-F238E27FC236}">
-                <a16:creationId xmlns:a16="http://schemas.microsoft.com/office/drawing/2014/main" id="{CB431EC2-6BFC-4A37-A3AE-9C72605C6EC7}"/>
+                <a16:creationId xmlns:a16="http://schemas.microsoft.com/office/drawing/2014/main" id="{8C06F833-9F59-4665-B60C-30553320BE22}"/>
               </a:ext>
             </a:extLst>
           </p:cNvPr>
@@ -4083,7 +4083,7 @@
           <p:cNvPr id="17" name="">
             <a:extLst xmlns:a="http://schemas.openxmlformats.org/drawingml/2006/main">
               <a:ext uri="{FF2B5EF4-FFF2-40B4-BE49-F238E27FC236}">
-                <a16:creationId xmlns:a16="http://schemas.microsoft.com/office/drawing/2014/main" id="{C320DB4F-D613-433E-B9AA-5C1098267D58}"/>
+                <a16:creationId xmlns:a16="http://schemas.microsoft.com/office/drawing/2014/main" id="{68C17B70-6615-41D4-8914-D886E2BF6363}"/>
               </a:ext>
             </a:extLst>
           </p:cNvPr>
@@ -4140,7 +4140,7 @@
           <p:cNvPr id="18" name="">
             <a:extLst xmlns:a="http://schemas.openxmlformats.org/drawingml/2006/main">
               <a:ext uri="{FF2B5EF4-FFF2-40B4-BE49-F238E27FC236}">
-                <a16:creationId xmlns:a16="http://schemas.microsoft.com/office/drawing/2014/main" id="{27AD4338-5FD9-45BF-A232-2535CE7B350B}"/>
+                <a16:creationId xmlns:a16="http://schemas.microsoft.com/office/drawing/2014/main" id="{30D03F59-DC07-455E-B3E9-9EC7B46A7709}"/>
               </a:ext>
             </a:extLst>
           </p:cNvPr>
@@ -4195,7 +4195,7 @@
     </p:spTree>
     <p:extLst>
       <p:ext uri="{BB962C8B-B14F-4D97-AF65-F5344CB8AC3E}">
-        <p14:creationId xmlns:p14="http://schemas.microsoft.com/office/powerpoint/2010/main" val="1288507888"/>
+        <p14:creationId xmlns:p14="http://schemas.microsoft.com/office/powerpoint/2010/main" val="1027717684"/>
       </p:ext>
     </p:extLst>
   </p:cSld>
@@ -4350,7 +4350,7 @@
           <p:cNvPr id="23" name="">
             <a:extLst xmlns:a="http://schemas.openxmlformats.org/drawingml/2006/main">
               <a:ext uri="{FF2B5EF4-FFF2-40B4-BE49-F238E27FC236}">
-                <a16:creationId xmlns:a16="http://schemas.microsoft.com/office/drawing/2014/main" id="{206EE4FC-010C-4FE6-A925-2F391FFF0BEE}"/>
+                <a16:creationId xmlns:a16="http://schemas.microsoft.com/office/drawing/2014/main" id="{564872E2-CFC9-43D2-9F66-779B3EC3FC23}"/>
               </a:ext>
             </a:extLst>
           </p:cNvPr>
@@ -4382,7 +4382,7 @@
           <p:cNvPr id="2" name="">
             <a:extLst xmlns:a="http://schemas.openxmlformats.org/drawingml/2006/main">
               <a:ext uri="{FF2B5EF4-FFF2-40B4-BE49-F238E27FC236}">
-                <a16:creationId xmlns:a16="http://schemas.microsoft.com/office/drawing/2014/main" id="{80DA0934-FD31-4904-8164-A35FDCBEB69A}"/>
+                <a16:creationId xmlns:a16="http://schemas.microsoft.com/office/drawing/2014/main" id="{D59FBEE9-C590-4C96-A219-9ACD456D9CB7}"/>
               </a:ext>
             </a:extLst>
           </p:cNvPr>
@@ -4439,7 +4439,7 @@
           <p:cNvPr id="3" name="">
             <a:extLst xmlns:a="http://schemas.openxmlformats.org/drawingml/2006/main">
               <a:ext uri="{FF2B5EF4-FFF2-40B4-BE49-F238E27FC236}">
-                <a16:creationId xmlns:a16="http://schemas.microsoft.com/office/drawing/2014/main" id="{7787FCDB-55EF-44ED-BE2D-4AD7894312F2}"/>
+                <a16:creationId xmlns:a16="http://schemas.microsoft.com/office/drawing/2014/main" id="{82D704EB-171E-4D3D-AEC1-269C8E5B94E4}"/>
               </a:ext>
             </a:extLst>
           </p:cNvPr>
@@ -4471,7 +4471,7 @@
           <p:cNvPr id="4" name="">
             <a:extLst xmlns:a="http://schemas.openxmlformats.org/drawingml/2006/main">
               <a:ext uri="{FF2B5EF4-FFF2-40B4-BE49-F238E27FC236}">
-                <a16:creationId xmlns:a16="http://schemas.microsoft.com/office/drawing/2014/main" id="{60EC1214-0A7E-454C-ADFD-994F7FD70270}"/>
+                <a16:creationId xmlns:a16="http://schemas.microsoft.com/office/drawing/2014/main" id="{05B0CF8E-B3BA-441C-B236-CD58275BAC08}"/>
               </a:ext>
             </a:extLst>
           </p:cNvPr>
@@ -4528,7 +4528,7 @@
           <p:cNvPr id="5" name="">
             <a:extLst xmlns:a="http://schemas.openxmlformats.org/drawingml/2006/main">
               <a:ext uri="{FF2B5EF4-FFF2-40B4-BE49-F238E27FC236}">
-                <a16:creationId xmlns:a16="http://schemas.microsoft.com/office/drawing/2014/main" id="{D087D6F4-CA7B-4153-9611-C0A85152C39E}"/>
+                <a16:creationId xmlns:a16="http://schemas.microsoft.com/office/drawing/2014/main" id="{607EFE8E-CE50-425B-98F2-7EE90FCD7159}"/>
               </a:ext>
             </a:extLst>
           </p:cNvPr>
@@ -4585,7 +4585,7 @@
           <p:cNvPr id="6" name="">
             <a:extLst xmlns:a="http://schemas.openxmlformats.org/drawingml/2006/main">
               <a:ext uri="{FF2B5EF4-FFF2-40B4-BE49-F238E27FC236}">
-                <a16:creationId xmlns:a16="http://schemas.microsoft.com/office/drawing/2014/main" id="{A59735BD-F767-44BE-B40D-D8530AFD3D0D}"/>
+                <a16:creationId xmlns:a16="http://schemas.microsoft.com/office/drawing/2014/main" id="{CB3344FC-B74F-4396-AD65-9E5077C27B6B}"/>
               </a:ext>
             </a:extLst>
           </p:cNvPr>
@@ -4642,7 +4642,7 @@
           <p:cNvPr id="7" name="">
             <a:extLst xmlns:a="http://schemas.openxmlformats.org/drawingml/2006/main">
               <a:ext uri="{FF2B5EF4-FFF2-40B4-BE49-F238E27FC236}">
-                <a16:creationId xmlns:a16="http://schemas.microsoft.com/office/drawing/2014/main" id="{6C05349B-E063-417E-BD25-CD686A3CC758}"/>
+                <a16:creationId xmlns:a16="http://schemas.microsoft.com/office/drawing/2014/main" id="{C34F3CEA-31BA-48A8-9ED7-8210D70ADB95}"/>
               </a:ext>
             </a:extLst>
           </p:cNvPr>
@@ -4674,7 +4674,7 @@
           <p:cNvPr id="8" name="">
             <a:extLst xmlns:a="http://schemas.openxmlformats.org/drawingml/2006/main">
               <a:ext uri="{FF2B5EF4-FFF2-40B4-BE49-F238E27FC236}">
-                <a16:creationId xmlns:a16="http://schemas.microsoft.com/office/drawing/2014/main" id="{8CAC633D-04EE-4F2A-B467-4FB380F672AE}"/>
+                <a16:creationId xmlns:a16="http://schemas.microsoft.com/office/drawing/2014/main" id="{74B0CE55-C869-4560-83A1-83BBFBF43A27}"/>
               </a:ext>
             </a:extLst>
           </p:cNvPr>
@@ -4731,7 +4731,7 @@
           <p:cNvPr id="9" name="">
             <a:extLst xmlns:a="http://schemas.openxmlformats.org/drawingml/2006/main">
               <a:ext uri="{FF2B5EF4-FFF2-40B4-BE49-F238E27FC236}">
-                <a16:creationId xmlns:a16="http://schemas.microsoft.com/office/drawing/2014/main" id="{1B3F0404-4949-4E98-BBB2-09D9AA4E94E3}"/>
+                <a16:creationId xmlns:a16="http://schemas.microsoft.com/office/drawing/2014/main" id="{DA4D92AE-553B-4DFD-92BB-2C66309D3BF8}"/>
               </a:ext>
             </a:extLst>
           </p:cNvPr>
@@ -4788,7 +4788,7 @@
           <p:cNvPr id="10" name="">
             <a:extLst xmlns:a="http://schemas.openxmlformats.org/drawingml/2006/main">
               <a:ext uri="{FF2B5EF4-FFF2-40B4-BE49-F238E27FC236}">
-                <a16:creationId xmlns:a16="http://schemas.microsoft.com/office/drawing/2014/main" id="{14A333CA-B2FB-4970-AA7A-5A47F030C248}"/>
+                <a16:creationId xmlns:a16="http://schemas.microsoft.com/office/drawing/2014/main" id="{14738A8C-45D3-475D-8F9A-E5FE2813C653}"/>
               </a:ext>
             </a:extLst>
           </p:cNvPr>
@@ -4822,7 +4822,7 @@
           <p:cNvPr id="11" name="">
             <a:extLst xmlns:a="http://schemas.openxmlformats.org/drawingml/2006/main">
               <a:ext uri="{FF2B5EF4-FFF2-40B4-BE49-F238E27FC236}">
-                <a16:creationId xmlns:a16="http://schemas.microsoft.com/office/drawing/2014/main" id="{7A1B2B98-1994-4FA7-8596-C443296B30E2}"/>
+                <a16:creationId xmlns:a16="http://schemas.microsoft.com/office/drawing/2014/main" id="{80A8A187-A32A-45A2-A472-242EC9888A3B}"/>
               </a:ext>
             </a:extLst>
           </p:cNvPr>
@@ -4854,7 +4854,7 @@
           <p:cNvPr id="12" name="">
             <a:extLst xmlns:a="http://schemas.openxmlformats.org/drawingml/2006/main">
               <a:ext uri="{FF2B5EF4-FFF2-40B4-BE49-F238E27FC236}">
-                <a16:creationId xmlns:a16="http://schemas.microsoft.com/office/drawing/2014/main" id="{8C2EEB5B-F054-4CD5-BC91-8F4EDAEDB68D}"/>
+                <a16:creationId xmlns:a16="http://schemas.microsoft.com/office/drawing/2014/main" id="{8DA45D81-C698-45F9-888A-EB55F75BFEC9}"/>
               </a:ext>
             </a:extLst>
           </p:cNvPr>
@@ -4911,7 +4911,7 @@
           <p:cNvPr id="13" name="">
             <a:extLst xmlns:a="http://schemas.openxmlformats.org/drawingml/2006/main">
               <a:ext uri="{FF2B5EF4-FFF2-40B4-BE49-F238E27FC236}">
-                <a16:creationId xmlns:a16="http://schemas.microsoft.com/office/drawing/2014/main" id="{6833ABA2-A8AF-4458-9717-353D3F0B15D0}"/>
+                <a16:creationId xmlns:a16="http://schemas.microsoft.com/office/drawing/2014/main" id="{05B16A8E-A39E-47C2-83D8-9C72457C5FDB}"/>
               </a:ext>
             </a:extLst>
           </p:cNvPr>
@@ -4968,7 +4968,7 @@
           <p:cNvPr id="14" name="">
             <a:extLst xmlns:a="http://schemas.openxmlformats.org/drawingml/2006/main">
               <a:ext uri="{FF2B5EF4-FFF2-40B4-BE49-F238E27FC236}">
-                <a16:creationId xmlns:a16="http://schemas.microsoft.com/office/drawing/2014/main" id="{4A9436B2-7309-4CAC-BE59-F74C3A0CE7B2}"/>
+                <a16:creationId xmlns:a16="http://schemas.microsoft.com/office/drawing/2014/main" id="{3B046A2D-3A8A-4060-9974-7F6752F4F8E9}"/>
               </a:ext>
             </a:extLst>
           </p:cNvPr>
@@ -5002,7 +5002,7 @@
           <p:cNvPr id="15" name="">
             <a:extLst xmlns:a="http://schemas.openxmlformats.org/drawingml/2006/main">
               <a:ext uri="{FF2B5EF4-FFF2-40B4-BE49-F238E27FC236}">
-                <a16:creationId xmlns:a16="http://schemas.microsoft.com/office/drawing/2014/main" id="{3933E965-DEC9-4FF5-8265-677C625FA6B8}"/>
+                <a16:creationId xmlns:a16="http://schemas.microsoft.com/office/drawing/2014/main" id="{879A9107-89A2-405A-9CD9-9C5DDDEF68CA}"/>
               </a:ext>
             </a:extLst>
           </p:cNvPr>
@@ -5034,7 +5034,7 @@
           <p:cNvPr id="16" name="">
             <a:extLst xmlns:a="http://schemas.openxmlformats.org/drawingml/2006/main">
               <a:ext uri="{FF2B5EF4-FFF2-40B4-BE49-F238E27FC236}">
-                <a16:creationId xmlns:a16="http://schemas.microsoft.com/office/drawing/2014/main" id="{4E9D87EE-B20D-4DD9-8375-EC92B0265101}"/>
+                <a16:creationId xmlns:a16="http://schemas.microsoft.com/office/drawing/2014/main" id="{C16433E0-DFF5-4BEC-BA00-412E6A4972F4}"/>
               </a:ext>
             </a:extLst>
           </p:cNvPr>
@@ -5091,7 +5091,7 @@
           <p:cNvPr id="17" name="">
             <a:extLst xmlns:a="http://schemas.openxmlformats.org/drawingml/2006/main">
               <a:ext uri="{FF2B5EF4-FFF2-40B4-BE49-F238E27FC236}">
-                <a16:creationId xmlns:a16="http://schemas.microsoft.com/office/drawing/2014/main" id="{5A7B4F1C-0EC3-459E-A629-77633A587DE5}"/>
+                <a16:creationId xmlns:a16="http://schemas.microsoft.com/office/drawing/2014/main" id="{84278CE7-E516-46AF-A35E-C59D9471AAF1}"/>
               </a:ext>
             </a:extLst>
           </p:cNvPr>
@@ -5148,7 +5148,7 @@
           <p:cNvPr id="18" name="">
             <a:extLst xmlns:a="http://schemas.openxmlformats.org/drawingml/2006/main">
               <a:ext uri="{FF2B5EF4-FFF2-40B4-BE49-F238E27FC236}">
-                <a16:creationId xmlns:a16="http://schemas.microsoft.com/office/drawing/2014/main" id="{FC1CA4D6-6B2A-4C76-B335-E6D51ACB2F6B}"/>
+                <a16:creationId xmlns:a16="http://schemas.microsoft.com/office/drawing/2014/main" id="{6D2D418B-9497-4447-A34F-D8F8A9516455}"/>
               </a:ext>
             </a:extLst>
           </p:cNvPr>
@@ -5182,7 +5182,7 @@
           <p:cNvPr id="19" name="">
             <a:extLst xmlns:a="http://schemas.openxmlformats.org/drawingml/2006/main">
               <a:ext uri="{FF2B5EF4-FFF2-40B4-BE49-F238E27FC236}">
-                <a16:creationId xmlns:a16="http://schemas.microsoft.com/office/drawing/2014/main" id="{29CF90A4-C1B8-4C44-8DB9-E16ED6FC5EAA}"/>
+                <a16:creationId xmlns:a16="http://schemas.microsoft.com/office/drawing/2014/main" id="{63B4C150-CB74-4A4B-AE9D-7A935C6EBA94}"/>
               </a:ext>
             </a:extLst>
           </p:cNvPr>
@@ -5214,7 +5214,7 @@
           <p:cNvPr id="20" name="">
             <a:extLst xmlns:a="http://schemas.openxmlformats.org/drawingml/2006/main">
               <a:ext uri="{FF2B5EF4-FFF2-40B4-BE49-F238E27FC236}">
-                <a16:creationId xmlns:a16="http://schemas.microsoft.com/office/drawing/2014/main" id="{54FBFA7C-FA1A-4331-83A9-70FF64B27FD9}"/>
+                <a16:creationId xmlns:a16="http://schemas.microsoft.com/office/drawing/2014/main" id="{20CC2EC7-81EA-4E55-AB49-5F0851AE3F14}"/>
               </a:ext>
             </a:extLst>
           </p:cNvPr>
@@ -5271,7 +5271,7 @@
           <p:cNvPr id="21" name="">
             <a:extLst xmlns:a="http://schemas.openxmlformats.org/drawingml/2006/main">
               <a:ext uri="{FF2B5EF4-FFF2-40B4-BE49-F238E27FC236}">
-                <a16:creationId xmlns:a16="http://schemas.microsoft.com/office/drawing/2014/main" id="{00C32EF4-D7EF-441A-A4D3-DA30BEDDB87A}"/>
+                <a16:creationId xmlns:a16="http://schemas.microsoft.com/office/drawing/2014/main" id="{F411F6A1-DBDF-4B7C-A0FA-619BFE0383B2}"/>
               </a:ext>
             </a:extLst>
           </p:cNvPr>
@@ -5328,7 +5328,7 @@
           <p:cNvPr id="22" name="">
             <a:extLst xmlns:a="http://schemas.openxmlformats.org/drawingml/2006/main">
               <a:ext uri="{FF2B5EF4-FFF2-40B4-BE49-F238E27FC236}">
-                <a16:creationId xmlns:a16="http://schemas.microsoft.com/office/drawing/2014/main" id="{8BD06B60-64E1-46A3-BC74-6008481376BA}"/>
+                <a16:creationId xmlns:a16="http://schemas.microsoft.com/office/drawing/2014/main" id="{CDE13CCE-216B-4A01-8F60-E315B388E235}"/>
               </a:ext>
             </a:extLst>
           </p:cNvPr>
@@ -5383,7 +5383,7 @@
     </p:spTree>
     <p:extLst>
       <p:ext uri="{BB962C8B-B14F-4D97-AF65-F5344CB8AC3E}">
-        <p14:creationId xmlns:p14="http://schemas.microsoft.com/office/powerpoint/2010/main" val="1909730059"/>
+        <p14:creationId xmlns:p14="http://schemas.microsoft.com/office/powerpoint/2010/main" val="596834617"/>
       </p:ext>
     </p:extLst>
   </p:cSld>
@@ -5584,7 +5584,7 @@
           <p:cNvPr id="23" name="">
             <a:extLst xmlns:a="http://schemas.openxmlformats.org/drawingml/2006/main">
               <a:ext uri="{FF2B5EF4-FFF2-40B4-BE49-F238E27FC236}">
-                <a16:creationId xmlns:a16="http://schemas.microsoft.com/office/drawing/2014/main" id="{3C7D86D9-D04B-455D-86F7-60ED948C5979}"/>
+                <a16:creationId xmlns:a16="http://schemas.microsoft.com/office/drawing/2014/main" id="{D97E5375-A92F-438A-843F-3EDB7C92BB42}"/>
               </a:ext>
             </a:extLst>
           </p:cNvPr>
@@ -5616,7 +5616,7 @@
           <p:cNvPr id="2" name="">
             <a:extLst xmlns:a="http://schemas.openxmlformats.org/drawingml/2006/main">
               <a:ext uri="{FF2B5EF4-FFF2-40B4-BE49-F238E27FC236}">
-                <a16:creationId xmlns:a16="http://schemas.microsoft.com/office/drawing/2014/main" id="{058DEBE2-7894-4503-A5F9-95AFBFE1D4CC}"/>
+                <a16:creationId xmlns:a16="http://schemas.microsoft.com/office/drawing/2014/main" id="{16DF0EA6-2857-4426-A5FC-8CD14121F260}"/>
               </a:ext>
             </a:extLst>
           </p:cNvPr>
@@ -5673,7 +5673,7 @@
           <p:cNvPr id="3" name="">
             <a:extLst xmlns:a="http://schemas.openxmlformats.org/drawingml/2006/main">
               <a:ext uri="{FF2B5EF4-FFF2-40B4-BE49-F238E27FC236}">
-                <a16:creationId xmlns:a16="http://schemas.microsoft.com/office/drawing/2014/main" id="{FE7F660F-F2F4-42C6-B8CC-EA3CE93C1FCB}"/>
+                <a16:creationId xmlns:a16="http://schemas.microsoft.com/office/drawing/2014/main" id="{1023F8D2-D27F-4794-8C8F-453C82E28841}"/>
               </a:ext>
             </a:extLst>
           </p:cNvPr>
@@ -5705,7 +5705,7 @@
           <p:cNvPr id="4" name="">
             <a:extLst xmlns:a="http://schemas.openxmlformats.org/drawingml/2006/main">
               <a:ext uri="{FF2B5EF4-FFF2-40B4-BE49-F238E27FC236}">
-                <a16:creationId xmlns:a16="http://schemas.microsoft.com/office/drawing/2014/main" id="{3D15D232-2C96-40A7-9855-5E2C16CAB3EC}"/>
+                <a16:creationId xmlns:a16="http://schemas.microsoft.com/office/drawing/2014/main" id="{954E63AC-A953-4CC3-96EF-2FABE84A9C86}"/>
               </a:ext>
             </a:extLst>
           </p:cNvPr>
@@ -5762,7 +5762,7 @@
           <p:cNvPr id="5" name="">
             <a:extLst xmlns:a="http://schemas.openxmlformats.org/drawingml/2006/main">
               <a:ext uri="{FF2B5EF4-FFF2-40B4-BE49-F238E27FC236}">
-                <a16:creationId xmlns:a16="http://schemas.microsoft.com/office/drawing/2014/main" id="{DEC315B2-A8F9-482B-B8F1-44956B661B65}"/>
+                <a16:creationId xmlns:a16="http://schemas.microsoft.com/office/drawing/2014/main" id="{DA4372EB-00E1-4CA5-ABB2-0CE1AA06D610}"/>
               </a:ext>
             </a:extLst>
           </p:cNvPr>
@@ -5819,7 +5819,7 @@
           <p:cNvPr id="6" name="">
             <a:extLst xmlns:a="http://schemas.openxmlformats.org/drawingml/2006/main">
               <a:ext uri="{FF2B5EF4-FFF2-40B4-BE49-F238E27FC236}">
-                <a16:creationId xmlns:a16="http://schemas.microsoft.com/office/drawing/2014/main" id="{5945A7FB-A6CF-4039-83D1-9788ACEF889A}"/>
+                <a16:creationId xmlns:a16="http://schemas.microsoft.com/office/drawing/2014/main" id="{0A559379-3488-49FC-9816-9798CC06A1EA}"/>
               </a:ext>
             </a:extLst>
           </p:cNvPr>
@@ -5876,7 +5876,7 @@
           <p:cNvPr id="7" name="">
             <a:extLst xmlns:a="http://schemas.openxmlformats.org/drawingml/2006/main">
               <a:ext uri="{FF2B5EF4-FFF2-40B4-BE49-F238E27FC236}">
-                <a16:creationId xmlns:a16="http://schemas.microsoft.com/office/drawing/2014/main" id="{2AF6474F-EBAD-4387-8BAF-0C5072351FCB}"/>
+                <a16:creationId xmlns:a16="http://schemas.microsoft.com/office/drawing/2014/main" id="{22963ADB-F2D5-4748-8FA9-9F9E9AB49A51}"/>
               </a:ext>
             </a:extLst>
           </p:cNvPr>
@@ -5908,7 +5908,7 @@
           <p:cNvPr id="8" name="">
             <a:extLst xmlns:a="http://schemas.openxmlformats.org/drawingml/2006/main">
               <a:ext uri="{FF2B5EF4-FFF2-40B4-BE49-F238E27FC236}">
-                <a16:creationId xmlns:a16="http://schemas.microsoft.com/office/drawing/2014/main" id="{3FB7FDEA-88F3-4AD9-A333-986512528385}"/>
+                <a16:creationId xmlns:a16="http://schemas.microsoft.com/office/drawing/2014/main" id="{61587820-87C4-41F2-802C-BA7E02015E90}"/>
               </a:ext>
             </a:extLst>
           </p:cNvPr>
@@ -5965,7 +5965,7 @@
           <p:cNvPr id="9" name="">
             <a:extLst xmlns:a="http://schemas.openxmlformats.org/drawingml/2006/main">
               <a:ext uri="{FF2B5EF4-FFF2-40B4-BE49-F238E27FC236}">
-                <a16:creationId xmlns:a16="http://schemas.microsoft.com/office/drawing/2014/main" id="{ED0BA102-96AE-45E3-8CF1-4A4933FF17F4}"/>
+                <a16:creationId xmlns:a16="http://schemas.microsoft.com/office/drawing/2014/main" id="{3DF5F707-5770-4069-9B76-4DEAC76491FC}"/>
               </a:ext>
             </a:extLst>
           </p:cNvPr>
@@ -6022,7 +6022,7 @@
           <p:cNvPr id="10" name="">
             <a:extLst xmlns:a="http://schemas.openxmlformats.org/drawingml/2006/main">
               <a:ext uri="{FF2B5EF4-FFF2-40B4-BE49-F238E27FC236}">
-                <a16:creationId xmlns:a16="http://schemas.microsoft.com/office/drawing/2014/main" id="{809CBAD7-EA17-4CBE-A5D0-42ECDFAE4CBC}"/>
+                <a16:creationId xmlns:a16="http://schemas.microsoft.com/office/drawing/2014/main" id="{E17C0B4D-C543-4E36-AA5A-3C37AE510A39}"/>
               </a:ext>
             </a:extLst>
           </p:cNvPr>
@@ -6056,7 +6056,7 @@
           <p:cNvPr id="11" name="">
             <a:extLst xmlns:a="http://schemas.openxmlformats.org/drawingml/2006/main">
               <a:ext uri="{FF2B5EF4-FFF2-40B4-BE49-F238E27FC236}">
-                <a16:creationId xmlns:a16="http://schemas.microsoft.com/office/drawing/2014/main" id="{43AE002B-C93D-41B3-869E-01DC822D2591}"/>
+                <a16:creationId xmlns:a16="http://schemas.microsoft.com/office/drawing/2014/main" id="{1F876C1E-081B-4CA8-ACE8-7CCAC34B304F}"/>
               </a:ext>
             </a:extLst>
           </p:cNvPr>
@@ -6088,7 +6088,7 @@
           <p:cNvPr id="12" name="">
             <a:extLst xmlns:a="http://schemas.openxmlformats.org/drawingml/2006/main">
               <a:ext uri="{FF2B5EF4-FFF2-40B4-BE49-F238E27FC236}">
-                <a16:creationId xmlns:a16="http://schemas.microsoft.com/office/drawing/2014/main" id="{106CB751-591A-43C2-83E8-1C75100B6DBA}"/>
+                <a16:creationId xmlns:a16="http://schemas.microsoft.com/office/drawing/2014/main" id="{EFBFC850-580E-479E-81B9-25CCB2584434}"/>
               </a:ext>
             </a:extLst>
           </p:cNvPr>
@@ -6145,7 +6145,7 @@
           <p:cNvPr id="13" name="">
             <a:extLst xmlns:a="http://schemas.openxmlformats.org/drawingml/2006/main">
               <a:ext uri="{FF2B5EF4-FFF2-40B4-BE49-F238E27FC236}">
-                <a16:creationId xmlns:a16="http://schemas.microsoft.com/office/drawing/2014/main" id="{11575DBB-8935-478F-B90C-D828BD8242E8}"/>
+                <a16:creationId xmlns:a16="http://schemas.microsoft.com/office/drawing/2014/main" id="{415D8BF8-A157-43CA-9D3A-615F401474F6}"/>
               </a:ext>
             </a:extLst>
           </p:cNvPr>
@@ -6202,7 +6202,7 @@
           <p:cNvPr id="14" name="">
             <a:extLst xmlns:a="http://schemas.openxmlformats.org/drawingml/2006/main">
               <a:ext uri="{FF2B5EF4-FFF2-40B4-BE49-F238E27FC236}">
-                <a16:creationId xmlns:a16="http://schemas.microsoft.com/office/drawing/2014/main" id="{AE966A49-921D-4AC7-8C18-FCAB7EE0B24F}"/>
+                <a16:creationId xmlns:a16="http://schemas.microsoft.com/office/drawing/2014/main" id="{6499416D-91F4-498B-BA5F-5D57A8BA010A}"/>
               </a:ext>
             </a:extLst>
           </p:cNvPr>
@@ -6236,7 +6236,7 @@
           <p:cNvPr id="15" name="">
             <a:extLst xmlns:a="http://schemas.openxmlformats.org/drawingml/2006/main">
               <a:ext uri="{FF2B5EF4-FFF2-40B4-BE49-F238E27FC236}">
-                <a16:creationId xmlns:a16="http://schemas.microsoft.com/office/drawing/2014/main" id="{47B57702-255A-4D12-977F-5D9684B9F578}"/>
+                <a16:creationId xmlns:a16="http://schemas.microsoft.com/office/drawing/2014/main" id="{CDBD48B3-2C65-4533-871A-47763C7C431D}"/>
               </a:ext>
             </a:extLst>
           </p:cNvPr>
@@ -6268,7 +6268,7 @@
           <p:cNvPr id="16" name="">
             <a:extLst xmlns:a="http://schemas.openxmlformats.org/drawingml/2006/main">
               <a:ext uri="{FF2B5EF4-FFF2-40B4-BE49-F238E27FC236}">
-                <a16:creationId xmlns:a16="http://schemas.microsoft.com/office/drawing/2014/main" id="{907DAE33-77E6-489E-9035-4CAF00054F9E}"/>
+                <a16:creationId xmlns:a16="http://schemas.microsoft.com/office/drawing/2014/main" id="{B52B39EB-CB46-4FC6-8F8A-C86B1B618C4E}"/>
               </a:ext>
             </a:extLst>
           </p:cNvPr>
@@ -6325,7 +6325,7 @@
           <p:cNvPr id="17" name="">
             <a:extLst xmlns:a="http://schemas.openxmlformats.org/drawingml/2006/main">
               <a:ext uri="{FF2B5EF4-FFF2-40B4-BE49-F238E27FC236}">
-                <a16:creationId xmlns:a16="http://schemas.microsoft.com/office/drawing/2014/main" id="{4444F5F0-2844-4868-A297-C8C2C8CF09D5}"/>
+                <a16:creationId xmlns:a16="http://schemas.microsoft.com/office/drawing/2014/main" id="{0E99A66E-00E2-417D-9938-FB9AFA3BC883}"/>
               </a:ext>
             </a:extLst>
           </p:cNvPr>
@@ -6382,7 +6382,7 @@
           <p:cNvPr id="18" name="">
             <a:extLst xmlns:a="http://schemas.openxmlformats.org/drawingml/2006/main">
               <a:ext uri="{FF2B5EF4-FFF2-40B4-BE49-F238E27FC236}">
-                <a16:creationId xmlns:a16="http://schemas.microsoft.com/office/drawing/2014/main" id="{9900136A-F3B2-4997-B448-65611F83791A}"/>
+                <a16:creationId xmlns:a16="http://schemas.microsoft.com/office/drawing/2014/main" id="{644A6597-632C-4385-B1EF-DBCEDFBC8B97}"/>
               </a:ext>
             </a:extLst>
           </p:cNvPr>
@@ -6416,7 +6416,7 @@
           <p:cNvPr id="19" name="">
             <a:extLst xmlns:a="http://schemas.openxmlformats.org/drawingml/2006/main">
               <a:ext uri="{FF2B5EF4-FFF2-40B4-BE49-F238E27FC236}">
-                <a16:creationId xmlns:a16="http://schemas.microsoft.com/office/drawing/2014/main" id="{EEC9DFCB-E81D-42AB-9526-5E8EC53F5138}"/>
+                <a16:creationId xmlns:a16="http://schemas.microsoft.com/office/drawing/2014/main" id="{628D7BA5-C54D-42E0-BB92-2C38F25A67A3}"/>
               </a:ext>
             </a:extLst>
           </p:cNvPr>
@@ -6448,7 +6448,7 @@
           <p:cNvPr id="20" name="">
             <a:extLst xmlns:a="http://schemas.openxmlformats.org/drawingml/2006/main">
               <a:ext uri="{FF2B5EF4-FFF2-40B4-BE49-F238E27FC236}">
-                <a16:creationId xmlns:a16="http://schemas.microsoft.com/office/drawing/2014/main" id="{BB75613D-16CD-4404-A54C-F8787AAF1C5A}"/>
+                <a16:creationId xmlns:a16="http://schemas.microsoft.com/office/drawing/2014/main" id="{B39675FC-758F-44CA-9034-5A82E99454E3}"/>
               </a:ext>
             </a:extLst>
           </p:cNvPr>
@@ -6505,7 +6505,7 @@
           <p:cNvPr id="21" name="">
             <a:extLst xmlns:a="http://schemas.openxmlformats.org/drawingml/2006/main">
               <a:ext uri="{FF2B5EF4-FFF2-40B4-BE49-F238E27FC236}">
-                <a16:creationId xmlns:a16="http://schemas.microsoft.com/office/drawing/2014/main" id="{CD603255-A1A8-4581-9688-79E0F71E72BD}"/>
+                <a16:creationId xmlns:a16="http://schemas.microsoft.com/office/drawing/2014/main" id="{27E743CB-8011-4483-A7A9-C744CC3D644F}"/>
               </a:ext>
             </a:extLst>
           </p:cNvPr>
@@ -6562,7 +6562,7 @@
           <p:cNvPr id="22" name="">
             <a:extLst xmlns:a="http://schemas.openxmlformats.org/drawingml/2006/main">
               <a:ext uri="{FF2B5EF4-FFF2-40B4-BE49-F238E27FC236}">
-                <a16:creationId xmlns:a16="http://schemas.microsoft.com/office/drawing/2014/main" id="{AF1901E7-564D-42A3-BA2C-2EF015406859}"/>
+                <a16:creationId xmlns:a16="http://schemas.microsoft.com/office/drawing/2014/main" id="{9037E5CB-72AC-4BEF-BACF-55954A826CD8}"/>
               </a:ext>
             </a:extLst>
           </p:cNvPr>
@@ -6617,7 +6617,7 @@
     </p:spTree>
     <p:extLst>
       <p:ext uri="{BB962C8B-B14F-4D97-AF65-F5344CB8AC3E}">
-        <p14:creationId xmlns:p14="http://schemas.microsoft.com/office/powerpoint/2010/main" val="983636827"/>
+        <p14:creationId xmlns:p14="http://schemas.microsoft.com/office/powerpoint/2010/main" val="733294078"/>
       </p:ext>
     </p:extLst>
   </p:cSld>
@@ -6818,7 +6818,7 @@
           <p:cNvPr id="16" name="">
             <a:extLst xmlns:a="http://schemas.openxmlformats.org/drawingml/2006/main">
               <a:ext uri="{FF2B5EF4-FFF2-40B4-BE49-F238E27FC236}">
-                <a16:creationId xmlns:a16="http://schemas.microsoft.com/office/drawing/2014/main" id="{70CD8FD1-D57C-4818-A2FB-DF2E312533DF}"/>
+                <a16:creationId xmlns:a16="http://schemas.microsoft.com/office/drawing/2014/main" id="{376FDC92-8492-47D0-837F-ABD9BB39D7CD}"/>
               </a:ext>
             </a:extLst>
           </p:cNvPr>
@@ -6850,7 +6850,7 @@
           <p:cNvPr id="2" name="">
             <a:extLst xmlns:a="http://schemas.openxmlformats.org/drawingml/2006/main">
               <a:ext uri="{FF2B5EF4-FFF2-40B4-BE49-F238E27FC236}">
-                <a16:creationId xmlns:a16="http://schemas.microsoft.com/office/drawing/2014/main" id="{0707A213-6476-485E-95E7-C75ABF180A06}"/>
+                <a16:creationId xmlns:a16="http://schemas.microsoft.com/office/drawing/2014/main" id="{3B3147CD-FC65-4B47-9EBB-074E4B928FD1}"/>
               </a:ext>
             </a:extLst>
           </p:cNvPr>
@@ -6907,7 +6907,7 @@
           <p:cNvPr id="3" name="">
             <a:extLst xmlns:a="http://schemas.openxmlformats.org/drawingml/2006/main">
               <a:ext uri="{FF2B5EF4-FFF2-40B4-BE49-F238E27FC236}">
-                <a16:creationId xmlns:a16="http://schemas.microsoft.com/office/drawing/2014/main" id="{80A2EE60-7808-4272-87CD-582FAA6A335E}"/>
+                <a16:creationId xmlns:a16="http://schemas.microsoft.com/office/drawing/2014/main" id="{B2F17EFC-7C44-41E9-B7BF-EC5914CB1D79}"/>
               </a:ext>
             </a:extLst>
           </p:cNvPr>
@@ -6939,7 +6939,7 @@
           <p:cNvPr id="4" name="">
             <a:extLst xmlns:a="http://schemas.openxmlformats.org/drawingml/2006/main">
               <a:ext uri="{FF2B5EF4-FFF2-40B4-BE49-F238E27FC236}">
-                <a16:creationId xmlns:a16="http://schemas.microsoft.com/office/drawing/2014/main" id="{CAF77BA8-2315-4793-8D49-01ED52A48DD9}"/>
+                <a16:creationId xmlns:a16="http://schemas.microsoft.com/office/drawing/2014/main" id="{1F113051-5BF0-46FE-A336-91F1A38B1C6A}"/>
               </a:ext>
             </a:extLst>
           </p:cNvPr>
@@ -6996,7 +6996,7 @@
           <p:cNvPr id="5" name="">
             <a:extLst xmlns:a="http://schemas.openxmlformats.org/drawingml/2006/main">
               <a:ext uri="{FF2B5EF4-FFF2-40B4-BE49-F238E27FC236}">
-                <a16:creationId xmlns:a16="http://schemas.microsoft.com/office/drawing/2014/main" id="{1AF8EB1A-2ED8-4814-8DA1-B2062C3187CC}"/>
+                <a16:creationId xmlns:a16="http://schemas.microsoft.com/office/drawing/2014/main" id="{3A96478B-E5F3-4183-9357-4BFAF9A12297}"/>
               </a:ext>
             </a:extLst>
           </p:cNvPr>
@@ -7053,7 +7053,7 @@
           <p:cNvPr id="6" name="">
             <a:extLst xmlns:a="http://schemas.openxmlformats.org/drawingml/2006/main">
               <a:ext uri="{FF2B5EF4-FFF2-40B4-BE49-F238E27FC236}">
-                <a16:creationId xmlns:a16="http://schemas.microsoft.com/office/drawing/2014/main" id="{77CCDF1A-24B7-4303-9CFB-2B33778CDCD1}"/>
+                <a16:creationId xmlns:a16="http://schemas.microsoft.com/office/drawing/2014/main" id="{F4917437-F521-469A-A2E8-2A2D65627DA4}"/>
               </a:ext>
             </a:extLst>
           </p:cNvPr>
@@ -7110,7 +7110,7 @@
           <p:cNvPr id="7" name="">
             <a:extLst xmlns:a="http://schemas.openxmlformats.org/drawingml/2006/main">
               <a:ext uri="{FF2B5EF4-FFF2-40B4-BE49-F238E27FC236}">
-                <a16:creationId xmlns:a16="http://schemas.microsoft.com/office/drawing/2014/main" id="{0D201D83-0A1E-4335-B9A8-CA9FCB86CEB8}"/>
+                <a16:creationId xmlns:a16="http://schemas.microsoft.com/office/drawing/2014/main" id="{AE729B02-7C46-46DA-9076-3C86E38929B6}"/>
               </a:ext>
             </a:extLst>
           </p:cNvPr>
@@ -7142,7 +7142,7 @@
           <p:cNvPr id="8" name="">
             <a:extLst xmlns:a="http://schemas.openxmlformats.org/drawingml/2006/main">
               <a:ext uri="{FF2B5EF4-FFF2-40B4-BE49-F238E27FC236}">
-                <a16:creationId xmlns:a16="http://schemas.microsoft.com/office/drawing/2014/main" id="{319A6849-E447-4446-BE9E-3DDE132A820F}"/>
+                <a16:creationId xmlns:a16="http://schemas.microsoft.com/office/drawing/2014/main" id="{DBEE8C11-D1F4-44BF-8A67-4C54428D47F4}"/>
               </a:ext>
             </a:extLst>
           </p:cNvPr>
@@ -7199,7 +7199,7 @@
           <p:cNvPr id="9" name="">
             <a:extLst xmlns:a="http://schemas.openxmlformats.org/drawingml/2006/main">
               <a:ext uri="{FF2B5EF4-FFF2-40B4-BE49-F238E27FC236}">
-                <a16:creationId xmlns:a16="http://schemas.microsoft.com/office/drawing/2014/main" id="{2DCF4988-4889-4E78-AAEC-253C654E1936}"/>
+                <a16:creationId xmlns:a16="http://schemas.microsoft.com/office/drawing/2014/main" id="{F8C19E17-B8A0-473D-9999-A76D2836568D}"/>
               </a:ext>
             </a:extLst>
           </p:cNvPr>
@@ -7256,7 +7256,7 @@
           <p:cNvPr id="10" name="">
             <a:extLst xmlns:a="http://schemas.openxmlformats.org/drawingml/2006/main">
               <a:ext uri="{FF2B5EF4-FFF2-40B4-BE49-F238E27FC236}">
-                <a16:creationId xmlns:a16="http://schemas.microsoft.com/office/drawing/2014/main" id="{4C0596EC-6DDC-4179-8B4D-6BE04340A8A3}"/>
+                <a16:creationId xmlns:a16="http://schemas.microsoft.com/office/drawing/2014/main" id="{545AA471-DF35-4457-8A5F-85D739BC3C62}"/>
               </a:ext>
             </a:extLst>
           </p:cNvPr>
@@ -7313,7 +7313,7 @@
           <p:cNvPr id="11" name="">
             <a:extLst xmlns:a="http://schemas.openxmlformats.org/drawingml/2006/main">
               <a:ext uri="{FF2B5EF4-FFF2-40B4-BE49-F238E27FC236}">
-                <a16:creationId xmlns:a16="http://schemas.microsoft.com/office/drawing/2014/main" id="{3E1BDE83-C7C7-478C-8C42-94628985799F}"/>
+                <a16:creationId xmlns:a16="http://schemas.microsoft.com/office/drawing/2014/main" id="{3C52B9A0-1AD7-4CE2-8E8C-26A35D2807AD}"/>
               </a:ext>
             </a:extLst>
           </p:cNvPr>
@@ -7345,7 +7345,7 @@
           <p:cNvPr id="12" name="">
             <a:extLst xmlns:a="http://schemas.openxmlformats.org/drawingml/2006/main">
               <a:ext uri="{FF2B5EF4-FFF2-40B4-BE49-F238E27FC236}">
-                <a16:creationId xmlns:a16="http://schemas.microsoft.com/office/drawing/2014/main" id="{85FDFDBD-3C8F-431A-AD4F-64033078D9B0}"/>
+                <a16:creationId xmlns:a16="http://schemas.microsoft.com/office/drawing/2014/main" id="{DD884BDD-8D25-42D2-B764-0C0978C52874}"/>
               </a:ext>
             </a:extLst>
           </p:cNvPr>
@@ -7402,7 +7402,7 @@
           <p:cNvPr id="13" name="">
             <a:extLst xmlns:a="http://schemas.openxmlformats.org/drawingml/2006/main">
               <a:ext uri="{FF2B5EF4-FFF2-40B4-BE49-F238E27FC236}">
-                <a16:creationId xmlns:a16="http://schemas.microsoft.com/office/drawing/2014/main" id="{121A1B5E-3442-433C-A2F2-E18BB5B1022A}"/>
+                <a16:creationId xmlns:a16="http://schemas.microsoft.com/office/drawing/2014/main" id="{2AFB9B3F-F36A-42C8-BC4A-D87CF9EB2DB5}"/>
               </a:ext>
             </a:extLst>
           </p:cNvPr>
@@ -7459,7 +7459,7 @@
           <p:cNvPr id="14" name="">
             <a:extLst xmlns:a="http://schemas.openxmlformats.org/drawingml/2006/main">
               <a:ext uri="{FF2B5EF4-FFF2-40B4-BE49-F238E27FC236}">
-                <a16:creationId xmlns:a16="http://schemas.microsoft.com/office/drawing/2014/main" id="{0BAA8E2E-9C62-4B11-A2E0-73C974ACEDFF}"/>
+                <a16:creationId xmlns:a16="http://schemas.microsoft.com/office/drawing/2014/main" id="{BBBA23C5-4245-4D25-A2B3-54CDED6F4179}"/>
               </a:ext>
             </a:extLst>
           </p:cNvPr>
@@ -7516,7 +7516,7 @@
           <p:cNvPr id="15" name="">
             <a:extLst xmlns:a="http://schemas.openxmlformats.org/drawingml/2006/main">
               <a:ext uri="{FF2B5EF4-FFF2-40B4-BE49-F238E27FC236}">
-                <a16:creationId xmlns:a16="http://schemas.microsoft.com/office/drawing/2014/main" id="{928A8A6D-FE46-416D-B74D-E84EBD0DAF7D}"/>
+                <a16:creationId xmlns:a16="http://schemas.microsoft.com/office/drawing/2014/main" id="{E15841DF-E808-4FC6-BD2D-BD6893B4EAE7}"/>
               </a:ext>
             </a:extLst>
           </p:cNvPr>
@@ -7571,7 +7571,7 @@
     </p:spTree>
     <p:extLst>
       <p:ext uri="{BB962C8B-B14F-4D97-AF65-F5344CB8AC3E}">
-        <p14:creationId xmlns:p14="http://schemas.microsoft.com/office/powerpoint/2010/main" val="913017581"/>
+        <p14:creationId xmlns:p14="http://schemas.microsoft.com/office/powerpoint/2010/main" val="89260985"/>
       </p:ext>
     </p:extLst>
   </p:cSld>
@@ -7772,7 +7772,7 @@
           <p:cNvPr id="23" name="">
             <a:extLst xmlns:a="http://schemas.openxmlformats.org/drawingml/2006/main">
               <a:ext uri="{FF2B5EF4-FFF2-40B4-BE49-F238E27FC236}">
-                <a16:creationId xmlns:a16="http://schemas.microsoft.com/office/drawing/2014/main" id="{393F32E6-B960-40B7-9807-9A4DE34A9F4A}"/>
+                <a16:creationId xmlns:a16="http://schemas.microsoft.com/office/drawing/2014/main" id="{8C75D98E-674F-4946-8A25-460FF324C4C8}"/>
               </a:ext>
             </a:extLst>
           </p:cNvPr>
@@ -7804,7 +7804,7 @@
           <p:cNvPr id="2" name="">
             <a:extLst xmlns:a="http://schemas.openxmlformats.org/drawingml/2006/main">
               <a:ext uri="{FF2B5EF4-FFF2-40B4-BE49-F238E27FC236}">
-                <a16:creationId xmlns:a16="http://schemas.microsoft.com/office/drawing/2014/main" id="{7B00E41E-5CBE-4977-A9A0-FC56F46215E5}"/>
+                <a16:creationId xmlns:a16="http://schemas.microsoft.com/office/drawing/2014/main" id="{F069DFA4-ED08-46EA-9FBC-6A6A6FBB7B53}"/>
               </a:ext>
             </a:extLst>
           </p:cNvPr>
@@ -7861,7 +7861,7 @@
           <p:cNvPr id="3" name="">
             <a:extLst xmlns:a="http://schemas.openxmlformats.org/drawingml/2006/main">
               <a:ext uri="{FF2B5EF4-FFF2-40B4-BE49-F238E27FC236}">
-                <a16:creationId xmlns:a16="http://schemas.microsoft.com/office/drawing/2014/main" id="{14BBC337-BF8D-4179-9223-7E0F2685437A}"/>
+                <a16:creationId xmlns:a16="http://schemas.microsoft.com/office/drawing/2014/main" id="{93CB953D-9C95-4A97-98A4-9E7B44072F2E}"/>
               </a:ext>
             </a:extLst>
           </p:cNvPr>
@@ -7893,7 +7893,7 @@
           <p:cNvPr id="4" name="">
             <a:extLst xmlns:a="http://schemas.openxmlformats.org/drawingml/2006/main">
               <a:ext uri="{FF2B5EF4-FFF2-40B4-BE49-F238E27FC236}">
-                <a16:creationId xmlns:a16="http://schemas.microsoft.com/office/drawing/2014/main" id="{C593EA85-9772-47B3-8807-2464F50F3D57}"/>
+                <a16:creationId xmlns:a16="http://schemas.microsoft.com/office/drawing/2014/main" id="{9C8E062C-2FF2-4662-AD8D-F14EECACA446}"/>
               </a:ext>
             </a:extLst>
           </p:cNvPr>
@@ -7950,7 +7950,7 @@
           <p:cNvPr id="5" name="">
             <a:extLst xmlns:a="http://schemas.openxmlformats.org/drawingml/2006/main">
               <a:ext uri="{FF2B5EF4-FFF2-40B4-BE49-F238E27FC236}">
-                <a16:creationId xmlns:a16="http://schemas.microsoft.com/office/drawing/2014/main" id="{3F24604D-9E56-4018-AEDD-AFBA39A7BF07}"/>
+                <a16:creationId xmlns:a16="http://schemas.microsoft.com/office/drawing/2014/main" id="{7B988303-3CF0-4E5F-ADC8-F88C49C36980}"/>
               </a:ext>
             </a:extLst>
           </p:cNvPr>
@@ -8007,7 +8007,7 @@
           <p:cNvPr id="6" name="">
             <a:extLst xmlns:a="http://schemas.openxmlformats.org/drawingml/2006/main">
               <a:ext uri="{FF2B5EF4-FFF2-40B4-BE49-F238E27FC236}">
-                <a16:creationId xmlns:a16="http://schemas.microsoft.com/office/drawing/2014/main" id="{B60E2057-1703-49C9-865B-6F04A76D83CA}"/>
+                <a16:creationId xmlns:a16="http://schemas.microsoft.com/office/drawing/2014/main" id="{59ED223D-8466-49C4-8065-756BA689E44D}"/>
               </a:ext>
             </a:extLst>
           </p:cNvPr>
@@ -8064,7 +8064,7 @@
           <p:cNvPr id="7" name="">
             <a:extLst xmlns:a="http://schemas.openxmlformats.org/drawingml/2006/main">
               <a:ext uri="{FF2B5EF4-FFF2-40B4-BE49-F238E27FC236}">
-                <a16:creationId xmlns:a16="http://schemas.microsoft.com/office/drawing/2014/main" id="{C32AFE23-931C-457F-8C14-3FA823010622}"/>
+                <a16:creationId xmlns:a16="http://schemas.microsoft.com/office/drawing/2014/main" id="{B5CBEB8F-7C8E-47CB-B2A5-91FEFCE03866}"/>
               </a:ext>
             </a:extLst>
           </p:cNvPr>
@@ -8096,7 +8096,7 @@
           <p:cNvPr id="8" name="">
             <a:extLst xmlns:a="http://schemas.openxmlformats.org/drawingml/2006/main">
               <a:ext uri="{FF2B5EF4-FFF2-40B4-BE49-F238E27FC236}">
-                <a16:creationId xmlns:a16="http://schemas.microsoft.com/office/drawing/2014/main" id="{11A3CE50-9A3D-4744-81DC-DAF6DEF533DF}"/>
+                <a16:creationId xmlns:a16="http://schemas.microsoft.com/office/drawing/2014/main" id="{553849AB-5A14-4395-8107-7085901AB96D}"/>
               </a:ext>
             </a:extLst>
           </p:cNvPr>
@@ -8153,7 +8153,7 @@
           <p:cNvPr id="9" name="">
             <a:extLst xmlns:a="http://schemas.openxmlformats.org/drawingml/2006/main">
               <a:ext uri="{FF2B5EF4-FFF2-40B4-BE49-F238E27FC236}">
-                <a16:creationId xmlns:a16="http://schemas.microsoft.com/office/drawing/2014/main" id="{415AAC8D-E758-4224-A41E-85E47EE7D39B}"/>
+                <a16:creationId xmlns:a16="http://schemas.microsoft.com/office/drawing/2014/main" id="{7549CC89-35A4-4423-857A-C5623EAB169D}"/>
               </a:ext>
             </a:extLst>
           </p:cNvPr>
@@ -8210,19 +8210,19 @@
           <p:cNvPr id="10" name="">
             <a:extLst xmlns:a="http://schemas.openxmlformats.org/drawingml/2006/main">
               <a:ext uri="{FF2B5EF4-FFF2-40B4-BE49-F238E27FC236}">
-                <a16:creationId xmlns:a16="http://schemas.microsoft.com/office/drawing/2014/main" id="{C90DF676-8ED9-4317-A65F-69192A500590}"/>
-              </a:ext>
-            </a:extLst>
-          </p:cNvPr>
-          <p:cNvSpPr>
-            <a:spLocks xmlns:a="http://schemas.openxmlformats.org/drawingml/2006/main" noGrp="1"/>
-          </p:cNvSpPr>
-          <p:nvPr/>
-        </p:nvSpPr>
-        <p:spPr>
-          <a:xfrm xmlns:a="http://schemas.openxmlformats.org/drawingml/2006/main">
-            <a:off x="914400" y="1257300"/>
-            <a:ext cx="10363200" cy="781050"/>
+                <a16:creationId xmlns:a16="http://schemas.microsoft.com/office/drawing/2014/main" id="{E96FE980-30B3-4D89-959E-1DC1326C9335}"/>
+              </a:ext>
+            </a:extLst>
+          </p:cNvPr>
+          <p:cNvSpPr>
+            <a:spLocks xmlns:a="http://schemas.openxmlformats.org/drawingml/2006/main" noGrp="1"/>
+          </p:cNvSpPr>
+          <p:nvPr/>
+        </p:nvSpPr>
+        <p:spPr>
+          <a:xfrm xmlns:a="http://schemas.openxmlformats.org/drawingml/2006/main">
+            <a:off x="857250" y="1219200"/>
+            <a:ext cx="10477500" cy="742950"/>
           </a:xfrm>
           <a:prstGeom xmlns:a="http://schemas.openxmlformats.org/drawingml/2006/main" prst="rect">
             <a:avLst/>
@@ -8239,7 +8239,7 @@
           <a:lstStyle xmlns:a="http://schemas.openxmlformats.org/drawingml/2006/main"/>
           <a:p xmlns:a="http://schemas.openxmlformats.org/drawingml/2006/main">
             <a:pPr algn="ctr">
-              <a:defRPr sz="2175" b="1">
+              <a:defRPr sz="2100" b="1">
                 <a:solidFill>
                   <a:srgbClr val="17253A"/>
                 </a:solidFill>
@@ -8249,7 +8249,7 @@
               </a:defRPr>
             </a:pPr>
             <a:r>
-              <a:rPr sz="2175" b="1">
+              <a:rPr sz="2100" b="1">
                 <a:solidFill>
                   <a:srgbClr val="17253A"/>
                 </a:solidFill>
@@ -8267,28 +8267,30 @@
           <p:cNvPr id="11" name="">
             <a:extLst xmlns:a="http://schemas.openxmlformats.org/drawingml/2006/main">
               <a:ext uri="{FF2B5EF4-FFF2-40B4-BE49-F238E27FC236}">
-                <a16:creationId xmlns:a16="http://schemas.microsoft.com/office/drawing/2014/main" id="{599B3FBB-A421-4CDD-97B2-5B5EBC6FFAA8}"/>
-              </a:ext>
-            </a:extLst>
-          </p:cNvPr>
-          <p:cNvSpPr>
-            <a:spLocks xmlns:a="http://schemas.openxmlformats.org/drawingml/2006/main" noGrp="1"/>
-          </p:cNvSpPr>
-          <p:nvPr/>
-        </p:nvSpPr>
-        <p:spPr>
-          <a:xfrm xmlns:a="http://schemas.openxmlformats.org/drawingml/2006/main">
-            <a:off x="1000125" y="2247900"/>
-            <a:ext cx="476250" cy="476250"/>
-          </a:xfrm>
-          <a:prstGeom xmlns:a="http://schemas.openxmlformats.org/drawingml/2006/main" prst="ellipse">
+                <a16:creationId xmlns:a16="http://schemas.microsoft.com/office/drawing/2014/main" id="{60D87E22-6747-4CE7-AE3E-CB933F409CBB}"/>
+              </a:ext>
+            </a:extLst>
+          </p:cNvPr>
+          <p:cNvSpPr>
+            <a:spLocks xmlns:a="http://schemas.openxmlformats.org/drawingml/2006/main" noGrp="1"/>
+          </p:cNvSpPr>
+          <p:nvPr/>
+        </p:nvSpPr>
+        <p:spPr>
+          <a:xfrm xmlns:a="http://schemas.openxmlformats.org/drawingml/2006/main">
+            <a:off x="971550" y="2124075"/>
+            <a:ext cx="38100" cy="3524250"/>
+          </a:xfrm>
+          <a:prstGeom xmlns:a="http://schemas.openxmlformats.org/drawingml/2006/main" prst="rect">
             <a:avLst/>
           </a:prstGeom>
           <a:solidFill xmlns:a="http://schemas.openxmlformats.org/drawingml/2006/main">
-            <a:srgbClr val="18324A"/>
+            <a:srgbClr val="2C6E73"/>
           </a:solidFill>
           <a:ln xmlns:a="http://schemas.openxmlformats.org/drawingml/2006/main" w="0">
-            <a:noFill/>
+            <a:solidFill>
+              <a:srgbClr val="2C6E73"/>
+            </a:solidFill>
           </a:ln>
         </p:spPr>
       </p:sp>
@@ -8297,19 +8299,19 @@
           <p:cNvPr id="12" name="">
             <a:extLst xmlns:a="http://schemas.openxmlformats.org/drawingml/2006/main">
               <a:ext uri="{FF2B5EF4-FFF2-40B4-BE49-F238E27FC236}">
-                <a16:creationId xmlns:a16="http://schemas.microsoft.com/office/drawing/2014/main" id="{91B038C8-A69A-403E-8465-984C0BD15505}"/>
-              </a:ext>
-            </a:extLst>
-          </p:cNvPr>
-          <p:cNvSpPr>
-            <a:spLocks xmlns:a="http://schemas.openxmlformats.org/drawingml/2006/main" noGrp="1"/>
-          </p:cNvSpPr>
-          <p:nvPr/>
-        </p:nvSpPr>
-        <p:spPr>
-          <a:xfrm xmlns:a="http://schemas.openxmlformats.org/drawingml/2006/main">
-            <a:off x="1000125" y="2276475"/>
-            <a:ext cx="476250" cy="419100"/>
+                <a16:creationId xmlns:a16="http://schemas.microsoft.com/office/drawing/2014/main" id="{FA3DADEF-E0DD-4254-B3D1-7F138BBB58C7}"/>
+              </a:ext>
+            </a:extLst>
+          </p:cNvPr>
+          <p:cNvSpPr>
+            <a:spLocks xmlns:a="http://schemas.openxmlformats.org/drawingml/2006/main" noGrp="1"/>
+          </p:cNvSpPr>
+          <p:nvPr/>
+        </p:nvSpPr>
+        <p:spPr>
+          <a:xfrm xmlns:a="http://schemas.openxmlformats.org/drawingml/2006/main">
+            <a:off x="1162050" y="2200275"/>
+            <a:ext cx="400050" cy="400050"/>
           </a:xfrm>
           <a:prstGeom xmlns:a="http://schemas.openxmlformats.org/drawingml/2006/main" prst="rect">
             <a:avLst/>
@@ -8326,9 +8328,9 @@
           <a:lstStyle xmlns:a="http://schemas.openxmlformats.org/drawingml/2006/main"/>
           <a:p xmlns:a="http://schemas.openxmlformats.org/drawingml/2006/main">
             <a:pPr algn="ctr">
-              <a:defRPr sz="1350" b="1">
-                <a:solidFill>
-                  <a:srgbClr val="FFFFFF"/>
+              <a:defRPr sz="1125" b="1">
+                <a:solidFill>
+                  <a:srgbClr val="2C6E73"/>
                 </a:solidFill>
                 <a:latin typeface="Arial"/>
                 <a:ea typeface="Arial"/>
@@ -8336,9 +8338,9 @@
               </a:defRPr>
             </a:pPr>
             <a:r>
-              <a:rPr sz="1350" b="1">
-                <a:solidFill>
-                  <a:srgbClr val="FFFFFF"/>
+              <a:rPr sz="1125" b="1">
+                <a:solidFill>
+                  <a:srgbClr val="2C6E73"/>
                 </a:solidFill>
                 <a:latin typeface="Arial"/>
                 <a:ea typeface="Arial"/>
@@ -8354,19 +8356,19 @@
           <p:cNvPr id="13" name="">
             <a:extLst xmlns:a="http://schemas.openxmlformats.org/drawingml/2006/main">
               <a:ext uri="{FF2B5EF4-FFF2-40B4-BE49-F238E27FC236}">
-                <a16:creationId xmlns:a16="http://schemas.microsoft.com/office/drawing/2014/main" id="{78C93B59-2054-4BBC-985B-BE843515269C}"/>
-              </a:ext>
-            </a:extLst>
-          </p:cNvPr>
-          <p:cNvSpPr>
-            <a:spLocks xmlns:a="http://schemas.openxmlformats.org/drawingml/2006/main" noGrp="1"/>
-          </p:cNvSpPr>
-          <p:nvPr/>
-        </p:nvSpPr>
-        <p:spPr>
-          <a:xfrm xmlns:a="http://schemas.openxmlformats.org/drawingml/2006/main">
-            <a:off x="1714500" y="2181225"/>
-            <a:ext cx="9429750" cy="609600"/>
+                <a16:creationId xmlns:a16="http://schemas.microsoft.com/office/drawing/2014/main" id="{A81FEFC2-052A-48F4-80C7-DECC97C45FCA}"/>
+              </a:ext>
+            </a:extLst>
+          </p:cNvPr>
+          <p:cNvSpPr>
+            <a:spLocks xmlns:a="http://schemas.openxmlformats.org/drawingml/2006/main" noGrp="1"/>
+          </p:cNvSpPr>
+          <p:nvPr/>
+        </p:nvSpPr>
+        <p:spPr>
+          <a:xfrm xmlns:a="http://schemas.openxmlformats.org/drawingml/2006/main">
+            <a:off x="1714500" y="2114550"/>
+            <a:ext cx="9525000" cy="809625"/>
           </a:xfrm>
           <a:prstGeom xmlns:a="http://schemas.openxmlformats.org/drawingml/2006/main" prst="rect">
             <a:avLst/>
@@ -8383,7 +8385,7 @@
           <a:lstStyle xmlns:a="http://schemas.openxmlformats.org/drawingml/2006/main"/>
           <a:p xmlns:a="http://schemas.openxmlformats.org/drawingml/2006/main">
             <a:pPr algn="l">
-              <a:defRPr sz="1500" b="0">
+              <a:defRPr sz="1725" b="0">
                 <a:solidFill>
                   <a:srgbClr val="17253A"/>
                 </a:solidFill>
@@ -8393,7 +8395,7 @@
               </a:defRPr>
             </a:pPr>
             <a:r>
-              <a:rPr sz="1500" b="0">
+              <a:rPr sz="1725" b="0">
                 <a:solidFill>
                   <a:srgbClr val="17253A"/>
                 </a:solidFill>
@@ -8401,7 +8403,7 @@
                 <a:ea typeface="Arial"/>
                 <a:cs typeface="Arial"/>
               </a:rPr>
-              <a:t>Identify the structure: Write the conversion fact and identify whether the unit becomes larger or smaller.</a:t>
+              <a:t>4.375 km</a:t>
             </a:r>
           </a:p>
         </p:txBody>
@@ -8411,28 +8413,30 @@
           <p:cNvPr id="14" name="">
             <a:extLst xmlns:a="http://schemas.openxmlformats.org/drawingml/2006/main">
               <a:ext uri="{FF2B5EF4-FFF2-40B4-BE49-F238E27FC236}">
-                <a16:creationId xmlns:a16="http://schemas.microsoft.com/office/drawing/2014/main" id="{7160217F-5DFF-4FE4-BA41-752ED9FCE617}"/>
-              </a:ext>
-            </a:extLst>
-          </p:cNvPr>
-          <p:cNvSpPr>
-            <a:spLocks xmlns:a="http://schemas.openxmlformats.org/drawingml/2006/main" noGrp="1"/>
-          </p:cNvSpPr>
-          <p:nvPr/>
-        </p:nvSpPr>
-        <p:spPr>
-          <a:xfrm xmlns:a="http://schemas.openxmlformats.org/drawingml/2006/main">
-            <a:off x="1000125" y="2990850"/>
-            <a:ext cx="476250" cy="476250"/>
-          </a:xfrm>
-          <a:prstGeom xmlns:a="http://schemas.openxmlformats.org/drawingml/2006/main" prst="ellipse">
+                <a16:creationId xmlns:a16="http://schemas.microsoft.com/office/drawing/2014/main" id="{EFE8703A-6CD9-4C2D-946D-0E78503E0799}"/>
+              </a:ext>
+            </a:extLst>
+          </p:cNvPr>
+          <p:cNvSpPr>
+            <a:spLocks xmlns:a="http://schemas.openxmlformats.org/drawingml/2006/main" noGrp="1"/>
+          </p:cNvSpPr>
+          <p:nvPr/>
+        </p:nvSpPr>
+        <p:spPr>
+          <a:xfrm xmlns:a="http://schemas.openxmlformats.org/drawingml/2006/main">
+            <a:off x="1714500" y="2943225"/>
+            <a:ext cx="9334500" cy="9525"/>
+          </a:xfrm>
+          <a:prstGeom xmlns:a="http://schemas.openxmlformats.org/drawingml/2006/main" prst="rect">
             <a:avLst/>
           </a:prstGeom>
           <a:solidFill xmlns:a="http://schemas.openxmlformats.org/drawingml/2006/main">
-            <a:srgbClr val="2C6E73"/>
+            <a:srgbClr val="D9E0E6"/>
           </a:solidFill>
           <a:ln xmlns:a="http://schemas.openxmlformats.org/drawingml/2006/main" w="0">
-            <a:noFill/>
+            <a:solidFill>
+              <a:srgbClr val="D9E0E6"/>
+            </a:solidFill>
           </a:ln>
         </p:spPr>
       </p:sp>
@@ -8441,19 +8445,19 @@
           <p:cNvPr id="15" name="">
             <a:extLst xmlns:a="http://schemas.openxmlformats.org/drawingml/2006/main">
               <a:ext uri="{FF2B5EF4-FFF2-40B4-BE49-F238E27FC236}">
-                <a16:creationId xmlns:a16="http://schemas.microsoft.com/office/drawing/2014/main" id="{BD51A1FC-D4AD-4CA1-8D21-8481652BA9D1}"/>
-              </a:ext>
-            </a:extLst>
-          </p:cNvPr>
-          <p:cNvSpPr>
-            <a:spLocks xmlns:a="http://schemas.openxmlformats.org/drawingml/2006/main" noGrp="1"/>
-          </p:cNvSpPr>
-          <p:nvPr/>
-        </p:nvSpPr>
-        <p:spPr>
-          <a:xfrm xmlns:a="http://schemas.openxmlformats.org/drawingml/2006/main">
-            <a:off x="1000125" y="3019425"/>
-            <a:ext cx="476250" cy="419100"/>
+                <a16:creationId xmlns:a16="http://schemas.microsoft.com/office/drawing/2014/main" id="{CFFD5D2D-28BF-4370-8F69-3936248A644B}"/>
+              </a:ext>
+            </a:extLst>
+          </p:cNvPr>
+          <p:cNvSpPr>
+            <a:spLocks xmlns:a="http://schemas.openxmlformats.org/drawingml/2006/main" noGrp="1"/>
+          </p:cNvSpPr>
+          <p:nvPr/>
+        </p:nvSpPr>
+        <p:spPr>
+          <a:xfrm xmlns:a="http://schemas.openxmlformats.org/drawingml/2006/main">
+            <a:off x="1162050" y="3076575"/>
+            <a:ext cx="400050" cy="400050"/>
           </a:xfrm>
           <a:prstGeom xmlns:a="http://schemas.openxmlformats.org/drawingml/2006/main" prst="rect">
             <a:avLst/>
@@ -8470,9 +8474,9 @@
           <a:lstStyle xmlns:a="http://schemas.openxmlformats.org/drawingml/2006/main"/>
           <a:p xmlns:a="http://schemas.openxmlformats.org/drawingml/2006/main">
             <a:pPr algn="ctr">
-              <a:defRPr sz="1350" b="1">
-                <a:solidFill>
-                  <a:srgbClr val="FFFFFF"/>
+              <a:defRPr sz="1125" b="1">
+                <a:solidFill>
+                  <a:srgbClr val="2C6E73"/>
                 </a:solidFill>
                 <a:latin typeface="Arial"/>
                 <a:ea typeface="Arial"/>
@@ -8480,9 +8484,9 @@
               </a:defRPr>
             </a:pPr>
             <a:r>
-              <a:rPr sz="1350" b="1">
-                <a:solidFill>
-                  <a:srgbClr val="FFFFFF"/>
+              <a:rPr sz="1125" b="1">
+                <a:solidFill>
+                  <a:srgbClr val="2C6E73"/>
                 </a:solidFill>
                 <a:latin typeface="Arial"/>
                 <a:ea typeface="Arial"/>
@@ -8498,19 +8502,19 @@
           <p:cNvPr id="16" name="">
             <a:extLst xmlns:a="http://schemas.openxmlformats.org/drawingml/2006/main">
               <a:ext uri="{FF2B5EF4-FFF2-40B4-BE49-F238E27FC236}">
-                <a16:creationId xmlns:a16="http://schemas.microsoft.com/office/drawing/2014/main" id="{CDEF1CAB-AD57-4811-A4FA-5B19965FC161}"/>
-              </a:ext>
-            </a:extLst>
-          </p:cNvPr>
-          <p:cNvSpPr>
-            <a:spLocks xmlns:a="http://schemas.openxmlformats.org/drawingml/2006/main" noGrp="1"/>
-          </p:cNvSpPr>
-          <p:nvPr/>
-        </p:nvSpPr>
-        <p:spPr>
-          <a:xfrm xmlns:a="http://schemas.openxmlformats.org/drawingml/2006/main">
-            <a:off x="1714500" y="2924175"/>
-            <a:ext cx="9429750" cy="609600"/>
+                <a16:creationId xmlns:a16="http://schemas.microsoft.com/office/drawing/2014/main" id="{1BD339AC-2BE5-4180-A5E4-2F07237E7BED}"/>
+              </a:ext>
+            </a:extLst>
+          </p:cNvPr>
+          <p:cNvSpPr>
+            <a:spLocks xmlns:a="http://schemas.openxmlformats.org/drawingml/2006/main" noGrp="1"/>
+          </p:cNvSpPr>
+          <p:nvPr/>
+        </p:nvSpPr>
+        <p:spPr>
+          <a:xfrm xmlns:a="http://schemas.openxmlformats.org/drawingml/2006/main">
+            <a:off x="1714500" y="2990850"/>
+            <a:ext cx="9525000" cy="809625"/>
           </a:xfrm>
           <a:prstGeom xmlns:a="http://schemas.openxmlformats.org/drawingml/2006/main" prst="rect">
             <a:avLst/>
@@ -8527,7 +8531,7 @@
           <a:lstStyle xmlns:a="http://schemas.openxmlformats.org/drawingml/2006/main"/>
           <a:p xmlns:a="http://schemas.openxmlformats.org/drawingml/2006/main">
             <a:pPr algn="l">
-              <a:defRPr sz="1500" b="0">
+              <a:defRPr sz="1725" b="0">
                 <a:solidFill>
                   <a:srgbClr val="17253A"/>
                 </a:solidFill>
@@ -8537,7 +8541,7 @@
               </a:defRPr>
             </a:pPr>
             <a:r>
-              <a:rPr sz="1500" b="0">
+              <a:rPr sz="1725" b="0">
                 <a:solidFill>
                   <a:srgbClr val="17253A"/>
                 </a:solidFill>
@@ -8545,7 +8549,7 @@
                 <a:ea typeface="Arial"/>
                 <a:cs typeface="Arial"/>
               </a:rPr>
-              <a:t>Set up the method: Multiply or divide by the correct scale factor.</a:t>
+              <a:t>1 km = 1,000 m</a:t>
             </a:r>
           </a:p>
         </p:txBody>
@@ -8555,28 +8559,30 @@
           <p:cNvPr id="17" name="">
             <a:extLst xmlns:a="http://schemas.openxmlformats.org/drawingml/2006/main">
               <a:ext uri="{FF2B5EF4-FFF2-40B4-BE49-F238E27FC236}">
-                <a16:creationId xmlns:a16="http://schemas.microsoft.com/office/drawing/2014/main" id="{6E0CC138-3A2C-49E2-A8BF-72C5A35778EA}"/>
-              </a:ext>
-            </a:extLst>
-          </p:cNvPr>
-          <p:cNvSpPr>
-            <a:spLocks xmlns:a="http://schemas.openxmlformats.org/drawingml/2006/main" noGrp="1"/>
-          </p:cNvSpPr>
-          <p:nvPr/>
-        </p:nvSpPr>
-        <p:spPr>
-          <a:xfrm xmlns:a="http://schemas.openxmlformats.org/drawingml/2006/main">
-            <a:off x="1000125" y="3733800"/>
-            <a:ext cx="476250" cy="476250"/>
-          </a:xfrm>
-          <a:prstGeom xmlns:a="http://schemas.openxmlformats.org/drawingml/2006/main" prst="ellipse">
+                <a16:creationId xmlns:a16="http://schemas.microsoft.com/office/drawing/2014/main" id="{26B88581-0183-4A0F-BAE1-16B33A09CAD0}"/>
+              </a:ext>
+            </a:extLst>
+          </p:cNvPr>
+          <p:cNvSpPr>
+            <a:spLocks xmlns:a="http://schemas.openxmlformats.org/drawingml/2006/main" noGrp="1"/>
+          </p:cNvSpPr>
+          <p:nvPr/>
+        </p:nvSpPr>
+        <p:spPr>
+          <a:xfrm xmlns:a="http://schemas.openxmlformats.org/drawingml/2006/main">
+            <a:off x="1714500" y="3819525"/>
+            <a:ext cx="9334500" cy="9525"/>
+          </a:xfrm>
+          <a:prstGeom xmlns:a="http://schemas.openxmlformats.org/drawingml/2006/main" prst="rect">
             <a:avLst/>
           </a:prstGeom>
           <a:solidFill xmlns:a="http://schemas.openxmlformats.org/drawingml/2006/main">
-            <a:srgbClr val="2C6E73"/>
+            <a:srgbClr val="D9E0E6"/>
           </a:solidFill>
           <a:ln xmlns:a="http://schemas.openxmlformats.org/drawingml/2006/main" w="0">
-            <a:noFill/>
+            <a:solidFill>
+              <a:srgbClr val="D9E0E6"/>
+            </a:solidFill>
           </a:ln>
         </p:spPr>
       </p:sp>
@@ -8585,19 +8591,19 @@
           <p:cNvPr id="18" name="">
             <a:extLst xmlns:a="http://schemas.openxmlformats.org/drawingml/2006/main">
               <a:ext uri="{FF2B5EF4-FFF2-40B4-BE49-F238E27FC236}">
-                <a16:creationId xmlns:a16="http://schemas.microsoft.com/office/drawing/2014/main" id="{8DCBF305-C1C6-49E8-B5F1-16E6C5CC9613}"/>
-              </a:ext>
-            </a:extLst>
-          </p:cNvPr>
-          <p:cNvSpPr>
-            <a:spLocks xmlns:a="http://schemas.openxmlformats.org/drawingml/2006/main" noGrp="1"/>
-          </p:cNvSpPr>
-          <p:nvPr/>
-        </p:nvSpPr>
-        <p:spPr>
-          <a:xfrm xmlns:a="http://schemas.openxmlformats.org/drawingml/2006/main">
-            <a:off x="1000125" y="3762375"/>
-            <a:ext cx="476250" cy="419100"/>
+                <a16:creationId xmlns:a16="http://schemas.microsoft.com/office/drawing/2014/main" id="{FE36D4FC-3493-491B-9E48-C6C78184BE96}"/>
+              </a:ext>
+            </a:extLst>
+          </p:cNvPr>
+          <p:cNvSpPr>
+            <a:spLocks xmlns:a="http://schemas.openxmlformats.org/drawingml/2006/main" noGrp="1"/>
+          </p:cNvSpPr>
+          <p:nvPr/>
+        </p:nvSpPr>
+        <p:spPr>
+          <a:xfrm xmlns:a="http://schemas.openxmlformats.org/drawingml/2006/main">
+            <a:off x="1162050" y="3952875"/>
+            <a:ext cx="400050" cy="400050"/>
           </a:xfrm>
           <a:prstGeom xmlns:a="http://schemas.openxmlformats.org/drawingml/2006/main" prst="rect">
             <a:avLst/>
@@ -8614,9 +8620,9 @@
           <a:lstStyle xmlns:a="http://schemas.openxmlformats.org/drawingml/2006/main"/>
           <a:p xmlns:a="http://schemas.openxmlformats.org/drawingml/2006/main">
             <a:pPr algn="ctr">
-              <a:defRPr sz="1350" b="1">
-                <a:solidFill>
-                  <a:srgbClr val="FFFFFF"/>
+              <a:defRPr sz="1125" b="1">
+                <a:solidFill>
+                  <a:srgbClr val="2C6E73"/>
                 </a:solidFill>
                 <a:latin typeface="Arial"/>
                 <a:ea typeface="Arial"/>
@@ -8624,9 +8630,9 @@
               </a:defRPr>
             </a:pPr>
             <a:r>
-              <a:rPr sz="1350" b="1">
-                <a:solidFill>
-                  <a:srgbClr val="FFFFFF"/>
+              <a:rPr sz="1125" b="1">
+                <a:solidFill>
+                  <a:srgbClr val="2C6E73"/>
                 </a:solidFill>
                 <a:latin typeface="Arial"/>
                 <a:ea typeface="Arial"/>
@@ -8642,19 +8648,19 @@
           <p:cNvPr id="19" name="">
             <a:extLst xmlns:a="http://schemas.openxmlformats.org/drawingml/2006/main">
               <a:ext uri="{FF2B5EF4-FFF2-40B4-BE49-F238E27FC236}">
-                <a16:creationId xmlns:a16="http://schemas.microsoft.com/office/drawing/2014/main" id="{6A00998D-A503-4D70-9BF0-72CEF08FFB2B}"/>
-              </a:ext>
-            </a:extLst>
-          </p:cNvPr>
-          <p:cNvSpPr>
-            <a:spLocks xmlns:a="http://schemas.openxmlformats.org/drawingml/2006/main" noGrp="1"/>
-          </p:cNvSpPr>
-          <p:nvPr/>
-        </p:nvSpPr>
-        <p:spPr>
-          <a:xfrm xmlns:a="http://schemas.openxmlformats.org/drawingml/2006/main">
-            <a:off x="1714500" y="3667125"/>
-            <a:ext cx="9429750" cy="609600"/>
+                <a16:creationId xmlns:a16="http://schemas.microsoft.com/office/drawing/2014/main" id="{49712DA7-9AC8-4C4D-B4EE-1EB055C87AB1}"/>
+              </a:ext>
+            </a:extLst>
+          </p:cNvPr>
+          <p:cNvSpPr>
+            <a:spLocks xmlns:a="http://schemas.openxmlformats.org/drawingml/2006/main" noGrp="1"/>
+          </p:cNvSpPr>
+          <p:nvPr/>
+        </p:nvSpPr>
+        <p:spPr>
+          <a:xfrm xmlns:a="http://schemas.openxmlformats.org/drawingml/2006/main">
+            <a:off x="1714500" y="3867150"/>
+            <a:ext cx="9525000" cy="809625"/>
           </a:xfrm>
           <a:prstGeom xmlns:a="http://schemas.openxmlformats.org/drawingml/2006/main" prst="rect">
             <a:avLst/>
@@ -8671,7 +8677,7 @@
           <a:lstStyle xmlns:a="http://schemas.openxmlformats.org/drawingml/2006/main"/>
           <a:p xmlns:a="http://schemas.openxmlformats.org/drawingml/2006/main">
             <a:pPr algn="l">
-              <a:defRPr sz="1500" b="0">
+              <a:defRPr sz="1725" b="0">
                 <a:solidFill>
                   <a:srgbClr val="17253A"/>
                 </a:solidFill>
@@ -8681,7 +8687,7 @@
               </a:defRPr>
             </a:pPr>
             <a:r>
-              <a:rPr sz="1500" b="0">
+              <a:rPr sz="1725" b="0">
                 <a:solidFill>
                   <a:srgbClr val="17253A"/>
                 </a:solidFill>
@@ -8689,7 +8695,7 @@
                 <a:ea typeface="Arial"/>
                 <a:cs typeface="Arial"/>
               </a:rPr>
-              <a:t>Complete the calculation: 4,375 m.</a:t>
+              <a:t>4.375 × 1,000</a:t>
             </a:r>
           </a:p>
         </p:txBody>
@@ -8699,28 +8705,30 @@
           <p:cNvPr id="20" name="">
             <a:extLst xmlns:a="http://schemas.openxmlformats.org/drawingml/2006/main">
               <a:ext uri="{FF2B5EF4-FFF2-40B4-BE49-F238E27FC236}">
-                <a16:creationId xmlns:a16="http://schemas.microsoft.com/office/drawing/2014/main" id="{1DFB7807-F5D3-42BE-A1D7-32A52B5F2EA5}"/>
-              </a:ext>
-            </a:extLst>
-          </p:cNvPr>
-          <p:cNvSpPr>
-            <a:spLocks xmlns:a="http://schemas.openxmlformats.org/drawingml/2006/main" noGrp="1"/>
-          </p:cNvSpPr>
-          <p:nvPr/>
-        </p:nvSpPr>
-        <p:spPr>
-          <a:xfrm xmlns:a="http://schemas.openxmlformats.org/drawingml/2006/main">
-            <a:off x="1000125" y="4476750"/>
-            <a:ext cx="476250" cy="476250"/>
-          </a:xfrm>
-          <a:prstGeom xmlns:a="http://schemas.openxmlformats.org/drawingml/2006/main" prst="ellipse">
+                <a16:creationId xmlns:a16="http://schemas.microsoft.com/office/drawing/2014/main" id="{8B5553A3-8DE4-4780-AA19-91F2A069F4BC}"/>
+              </a:ext>
+            </a:extLst>
+          </p:cNvPr>
+          <p:cNvSpPr>
+            <a:spLocks xmlns:a="http://schemas.openxmlformats.org/drawingml/2006/main" noGrp="1"/>
+          </p:cNvSpPr>
+          <p:nvPr/>
+        </p:nvSpPr>
+        <p:spPr>
+          <a:xfrm xmlns:a="http://schemas.openxmlformats.org/drawingml/2006/main">
+            <a:off x="1714500" y="4695825"/>
+            <a:ext cx="9334500" cy="9525"/>
+          </a:xfrm>
+          <a:prstGeom xmlns:a="http://schemas.openxmlformats.org/drawingml/2006/main" prst="rect">
             <a:avLst/>
           </a:prstGeom>
           <a:solidFill xmlns:a="http://schemas.openxmlformats.org/drawingml/2006/main">
-            <a:srgbClr val="2C6E73"/>
+            <a:srgbClr val="D9E0E6"/>
           </a:solidFill>
           <a:ln xmlns:a="http://schemas.openxmlformats.org/drawingml/2006/main" w="0">
-            <a:noFill/>
+            <a:solidFill>
+              <a:srgbClr val="D9E0E6"/>
+            </a:solidFill>
           </a:ln>
         </p:spPr>
       </p:sp>
@@ -8729,19 +8737,19 @@
           <p:cNvPr id="21" name="">
             <a:extLst xmlns:a="http://schemas.openxmlformats.org/drawingml/2006/main">
               <a:ext uri="{FF2B5EF4-FFF2-40B4-BE49-F238E27FC236}">
-                <a16:creationId xmlns:a16="http://schemas.microsoft.com/office/drawing/2014/main" id="{E6A97A71-C41C-4879-B224-181073DD88C6}"/>
-              </a:ext>
-            </a:extLst>
-          </p:cNvPr>
-          <p:cNvSpPr>
-            <a:spLocks xmlns:a="http://schemas.openxmlformats.org/drawingml/2006/main" noGrp="1"/>
-          </p:cNvSpPr>
-          <p:nvPr/>
-        </p:nvSpPr>
-        <p:spPr>
-          <a:xfrm xmlns:a="http://schemas.openxmlformats.org/drawingml/2006/main">
-            <a:off x="1000125" y="4505325"/>
-            <a:ext cx="476250" cy="419100"/>
+                <a16:creationId xmlns:a16="http://schemas.microsoft.com/office/drawing/2014/main" id="{31A2A13A-3C48-440F-924E-222BDD7DE55F}"/>
+              </a:ext>
+            </a:extLst>
+          </p:cNvPr>
+          <p:cNvSpPr>
+            <a:spLocks xmlns:a="http://schemas.openxmlformats.org/drawingml/2006/main" noGrp="1"/>
+          </p:cNvSpPr>
+          <p:nvPr/>
+        </p:nvSpPr>
+        <p:spPr>
+          <a:xfrm xmlns:a="http://schemas.openxmlformats.org/drawingml/2006/main">
+            <a:off x="1162050" y="4829175"/>
+            <a:ext cx="400050" cy="400050"/>
           </a:xfrm>
           <a:prstGeom xmlns:a="http://schemas.openxmlformats.org/drawingml/2006/main" prst="rect">
             <a:avLst/>
@@ -8758,9 +8766,9 @@
           <a:lstStyle xmlns:a="http://schemas.openxmlformats.org/drawingml/2006/main"/>
           <a:p xmlns:a="http://schemas.openxmlformats.org/drawingml/2006/main">
             <a:pPr algn="ctr">
-              <a:defRPr sz="1350" b="1">
-                <a:solidFill>
-                  <a:srgbClr val="FFFFFF"/>
+              <a:defRPr sz="1125" b="1">
+                <a:solidFill>
+                  <a:srgbClr val="2F785D"/>
                 </a:solidFill>
                 <a:latin typeface="Arial"/>
                 <a:ea typeface="Arial"/>
@@ -8768,9 +8776,9 @@
               </a:defRPr>
             </a:pPr>
             <a:r>
-              <a:rPr sz="1350" b="1">
-                <a:solidFill>
-                  <a:srgbClr val="FFFFFF"/>
+              <a:rPr sz="1125" b="1">
+                <a:solidFill>
+                  <a:srgbClr val="2F785D"/>
                 </a:solidFill>
                 <a:latin typeface="Arial"/>
                 <a:ea typeface="Arial"/>
@@ -8786,19 +8794,19 @@
           <p:cNvPr id="22" name="">
             <a:extLst xmlns:a="http://schemas.openxmlformats.org/drawingml/2006/main">
               <a:ext uri="{FF2B5EF4-FFF2-40B4-BE49-F238E27FC236}">
-                <a16:creationId xmlns:a16="http://schemas.microsoft.com/office/drawing/2014/main" id="{F50D5B20-9E94-4BCA-BC36-8B7A81922A12}"/>
-              </a:ext>
-            </a:extLst>
-          </p:cNvPr>
-          <p:cNvSpPr>
-            <a:spLocks xmlns:a="http://schemas.openxmlformats.org/drawingml/2006/main" noGrp="1"/>
-          </p:cNvSpPr>
-          <p:nvPr/>
-        </p:nvSpPr>
-        <p:spPr>
-          <a:xfrm xmlns:a="http://schemas.openxmlformats.org/drawingml/2006/main">
-            <a:off x="1714500" y="4410075"/>
-            <a:ext cx="9429750" cy="609600"/>
+                <a16:creationId xmlns:a16="http://schemas.microsoft.com/office/drawing/2014/main" id="{970B6498-B0A1-4451-A5D1-72A76F4F3AE8}"/>
+              </a:ext>
+            </a:extLst>
+          </p:cNvPr>
+          <p:cNvSpPr>
+            <a:spLocks xmlns:a="http://schemas.openxmlformats.org/drawingml/2006/main" noGrp="1"/>
+          </p:cNvSpPr>
+          <p:nvPr/>
+        </p:nvSpPr>
+        <p:spPr>
+          <a:xfrm xmlns:a="http://schemas.openxmlformats.org/drawingml/2006/main">
+            <a:off x="1714500" y="4743450"/>
+            <a:ext cx="9525000" cy="809625"/>
           </a:xfrm>
           <a:prstGeom xmlns:a="http://schemas.openxmlformats.org/drawingml/2006/main" prst="rect">
             <a:avLst/>
@@ -8815,7 +8823,7 @@
           <a:lstStyle xmlns:a="http://schemas.openxmlformats.org/drawingml/2006/main"/>
           <a:p xmlns:a="http://schemas.openxmlformats.org/drawingml/2006/main">
             <a:pPr algn="l">
-              <a:defRPr sz="1500" b="1">
+              <a:defRPr sz="1725" b="1">
                 <a:solidFill>
                   <a:srgbClr val="2F785D"/>
                 </a:solidFill>
@@ -8825,7 +8833,7 @@
               </a:defRPr>
             </a:pPr>
             <a:r>
-              <a:rPr sz="1500" b="1">
+              <a:rPr sz="1725" b="1">
                 <a:solidFill>
                   <a:srgbClr val="2F785D"/>
                 </a:solidFill>
@@ -8833,7 +8841,7 @@
                 <a:ea typeface="Arial"/>
                 <a:cs typeface="Arial"/>
               </a:rPr>
-              <a:t>Check the result: Attach the unit and check the answer's size in context.</a:t>
+              <a:t>4,375 m</a:t>
             </a:r>
           </a:p>
         </p:txBody>
@@ -8841,7 +8849,7 @@
     </p:spTree>
     <p:extLst>
       <p:ext uri="{BB962C8B-B14F-4D97-AF65-F5344CB8AC3E}">
-        <p14:creationId xmlns:p14="http://schemas.microsoft.com/office/powerpoint/2010/main" val="1724127187"/>
+        <p14:creationId xmlns:p14="http://schemas.microsoft.com/office/powerpoint/2010/main" val="2066091434"/>
       </p:ext>
     </p:extLst>
   </p:cSld>
@@ -9134,7 +9142,7 @@
           <p:cNvPr id="15" name="">
             <a:extLst xmlns:a="http://schemas.openxmlformats.org/drawingml/2006/main">
               <a:ext uri="{FF2B5EF4-FFF2-40B4-BE49-F238E27FC236}">
-                <a16:creationId xmlns:a16="http://schemas.microsoft.com/office/drawing/2014/main" id="{974C6790-B6F9-4EC1-9461-DF5FE12F5750}"/>
+                <a16:creationId xmlns:a16="http://schemas.microsoft.com/office/drawing/2014/main" id="{95CB8E1D-DCF2-42C1-9019-5EC27CB94032}"/>
               </a:ext>
             </a:extLst>
           </p:cNvPr>
@@ -9166,7 +9174,7 @@
           <p:cNvPr id="2" name="">
             <a:extLst xmlns:a="http://schemas.openxmlformats.org/drawingml/2006/main">
               <a:ext uri="{FF2B5EF4-FFF2-40B4-BE49-F238E27FC236}">
-                <a16:creationId xmlns:a16="http://schemas.microsoft.com/office/drawing/2014/main" id="{7D383E01-B084-4652-83C7-C6D4BDA11BA3}"/>
+                <a16:creationId xmlns:a16="http://schemas.microsoft.com/office/drawing/2014/main" id="{4A1E00D8-F5A8-4318-917A-71E8CA9FFA43}"/>
               </a:ext>
             </a:extLst>
           </p:cNvPr>
@@ -9223,7 +9231,7 @@
           <p:cNvPr id="3" name="">
             <a:extLst xmlns:a="http://schemas.openxmlformats.org/drawingml/2006/main">
               <a:ext uri="{FF2B5EF4-FFF2-40B4-BE49-F238E27FC236}">
-                <a16:creationId xmlns:a16="http://schemas.microsoft.com/office/drawing/2014/main" id="{DA671FDA-3E92-486A-932F-B29FFACA79B7}"/>
+                <a16:creationId xmlns:a16="http://schemas.microsoft.com/office/drawing/2014/main" id="{4FA6C5C9-2DF9-4A21-A039-2793C1C7AACB}"/>
               </a:ext>
             </a:extLst>
           </p:cNvPr>
@@ -9255,7 +9263,7 @@
           <p:cNvPr id="4" name="">
             <a:extLst xmlns:a="http://schemas.openxmlformats.org/drawingml/2006/main">
               <a:ext uri="{FF2B5EF4-FFF2-40B4-BE49-F238E27FC236}">
-                <a16:creationId xmlns:a16="http://schemas.microsoft.com/office/drawing/2014/main" id="{0DAEC2DE-F149-4CB3-ACD4-DD86B31E0C4E}"/>
+                <a16:creationId xmlns:a16="http://schemas.microsoft.com/office/drawing/2014/main" id="{0ED14820-677D-468A-B94A-55F7B510C59C}"/>
               </a:ext>
             </a:extLst>
           </p:cNvPr>
@@ -9312,7 +9320,7 @@
           <p:cNvPr id="5" name="">
             <a:extLst xmlns:a="http://schemas.openxmlformats.org/drawingml/2006/main">
               <a:ext uri="{FF2B5EF4-FFF2-40B4-BE49-F238E27FC236}">
-                <a16:creationId xmlns:a16="http://schemas.microsoft.com/office/drawing/2014/main" id="{65B3EEA9-A6AF-40FC-BC1F-B5EF7523F003}"/>
+                <a16:creationId xmlns:a16="http://schemas.microsoft.com/office/drawing/2014/main" id="{58CD2C0D-5284-4254-B1B3-B9839B50939C}"/>
               </a:ext>
             </a:extLst>
           </p:cNvPr>
@@ -9369,7 +9377,7 @@
           <p:cNvPr id="6" name="">
             <a:extLst xmlns:a="http://schemas.openxmlformats.org/drawingml/2006/main">
               <a:ext uri="{FF2B5EF4-FFF2-40B4-BE49-F238E27FC236}">
-                <a16:creationId xmlns:a16="http://schemas.microsoft.com/office/drawing/2014/main" id="{671147ED-26FB-4828-AECC-435CC8D2CF1A}"/>
+                <a16:creationId xmlns:a16="http://schemas.microsoft.com/office/drawing/2014/main" id="{8197C5AC-87C4-4B0E-907D-9A0653C98F95}"/>
               </a:ext>
             </a:extLst>
           </p:cNvPr>
@@ -9426,7 +9434,7 @@
           <p:cNvPr id="7" name="">
             <a:extLst xmlns:a="http://schemas.openxmlformats.org/drawingml/2006/main">
               <a:ext uri="{FF2B5EF4-FFF2-40B4-BE49-F238E27FC236}">
-                <a16:creationId xmlns:a16="http://schemas.microsoft.com/office/drawing/2014/main" id="{AFCDC3E5-79B2-4155-ABE7-E384669DAF3D}"/>
+                <a16:creationId xmlns:a16="http://schemas.microsoft.com/office/drawing/2014/main" id="{5D982778-37DD-4FDB-990E-DAC46881E8E7}"/>
               </a:ext>
             </a:extLst>
           </p:cNvPr>
@@ -9458,7 +9466,7 @@
           <p:cNvPr id="8" name="">
             <a:extLst xmlns:a="http://schemas.openxmlformats.org/drawingml/2006/main">
               <a:ext uri="{FF2B5EF4-FFF2-40B4-BE49-F238E27FC236}">
-                <a16:creationId xmlns:a16="http://schemas.microsoft.com/office/drawing/2014/main" id="{776E5637-775A-4D3E-8AF2-6C6D3D912BCE}"/>
+                <a16:creationId xmlns:a16="http://schemas.microsoft.com/office/drawing/2014/main" id="{FB73F233-71F5-422F-8835-FCB9B2864AF9}"/>
               </a:ext>
             </a:extLst>
           </p:cNvPr>
@@ -9515,7 +9523,7 @@
           <p:cNvPr id="9" name="">
             <a:extLst xmlns:a="http://schemas.openxmlformats.org/drawingml/2006/main">
               <a:ext uri="{FF2B5EF4-FFF2-40B4-BE49-F238E27FC236}">
-                <a16:creationId xmlns:a16="http://schemas.microsoft.com/office/drawing/2014/main" id="{BABB684A-176B-4082-9B7D-4E95018816DC}"/>
+                <a16:creationId xmlns:a16="http://schemas.microsoft.com/office/drawing/2014/main" id="{B7B23C5D-94CE-4B6C-8189-A99AF4DFD256}"/>
               </a:ext>
             </a:extLst>
           </p:cNvPr>
@@ -9572,7 +9580,7 @@
           <p:cNvPr id="10" name="">
             <a:extLst xmlns:a="http://schemas.openxmlformats.org/drawingml/2006/main">
               <a:ext uri="{FF2B5EF4-FFF2-40B4-BE49-F238E27FC236}">
-                <a16:creationId xmlns:a16="http://schemas.microsoft.com/office/drawing/2014/main" id="{51AB9DB9-E632-4DED-A1B6-BC9808D25B39}"/>
+                <a16:creationId xmlns:a16="http://schemas.microsoft.com/office/drawing/2014/main" id="{18EBD654-3425-4B7A-B120-D45CA6C30ECE}"/>
               </a:ext>
             </a:extLst>
           </p:cNvPr>
@@ -9629,7 +9637,7 @@
           <p:cNvPr id="11" name="">
             <a:extLst xmlns:a="http://schemas.openxmlformats.org/drawingml/2006/main">
               <a:ext uri="{FF2B5EF4-FFF2-40B4-BE49-F238E27FC236}">
-                <a16:creationId xmlns:a16="http://schemas.microsoft.com/office/drawing/2014/main" id="{D103EE2D-CBAA-44B8-ADB5-E2FE98019D55}"/>
+                <a16:creationId xmlns:a16="http://schemas.microsoft.com/office/drawing/2014/main" id="{4365B359-5391-4E9B-88C2-0C41B67C7C85}"/>
               </a:ext>
             </a:extLst>
           </p:cNvPr>
@@ -9686,7 +9694,7 @@
           <p:cNvPr id="12" name="">
             <a:extLst xmlns:a="http://schemas.openxmlformats.org/drawingml/2006/main">
               <a:ext uri="{FF2B5EF4-FFF2-40B4-BE49-F238E27FC236}">
-                <a16:creationId xmlns:a16="http://schemas.microsoft.com/office/drawing/2014/main" id="{D2D769B6-D8F9-4203-B3A8-D15A9DB0C0D5}"/>
+                <a16:creationId xmlns:a16="http://schemas.microsoft.com/office/drawing/2014/main" id="{C004CD3E-5267-4882-9FD1-BDF31FA7F893}"/>
               </a:ext>
             </a:extLst>
           </p:cNvPr>
@@ -9718,7 +9726,7 @@
           <p:cNvPr id="13" name="">
             <a:extLst xmlns:a="http://schemas.openxmlformats.org/drawingml/2006/main">
               <a:ext uri="{FF2B5EF4-FFF2-40B4-BE49-F238E27FC236}">
-                <a16:creationId xmlns:a16="http://schemas.microsoft.com/office/drawing/2014/main" id="{AD19B32A-2006-41CD-AC37-D5102295139E}"/>
+                <a16:creationId xmlns:a16="http://schemas.microsoft.com/office/drawing/2014/main" id="{AAFD7260-D48F-49FD-A532-63D12AA0CFFA}"/>
               </a:ext>
             </a:extLst>
           </p:cNvPr>
@@ -9775,7 +9783,7 @@
           <p:cNvPr id="14" name="">
             <a:extLst xmlns:a="http://schemas.openxmlformats.org/drawingml/2006/main">
               <a:ext uri="{FF2B5EF4-FFF2-40B4-BE49-F238E27FC236}">
-                <a16:creationId xmlns:a16="http://schemas.microsoft.com/office/drawing/2014/main" id="{13453924-CCDA-4C70-8C4A-90F8956B3862}"/>
+                <a16:creationId xmlns:a16="http://schemas.microsoft.com/office/drawing/2014/main" id="{158CC5C5-8FC2-4FD0-8A11-8C90FEC9EBA6}"/>
               </a:ext>
             </a:extLst>
           </p:cNvPr>
@@ -9830,7 +9838,7 @@
     </p:spTree>
     <p:extLst>
       <p:ext uri="{BB962C8B-B14F-4D97-AF65-F5344CB8AC3E}">
-        <p14:creationId xmlns:p14="http://schemas.microsoft.com/office/powerpoint/2010/main" val="230264250"/>
+        <p14:creationId xmlns:p14="http://schemas.microsoft.com/office/powerpoint/2010/main" val="947644811"/>
       </p:ext>
     </p:extLst>
   </p:cSld>
@@ -10031,7 +10039,7 @@
           <p:cNvPr id="16" name="">
             <a:extLst xmlns:a="http://schemas.openxmlformats.org/drawingml/2006/main">
               <a:ext uri="{FF2B5EF4-FFF2-40B4-BE49-F238E27FC236}">
-                <a16:creationId xmlns:a16="http://schemas.microsoft.com/office/drawing/2014/main" id="{47657E46-00EF-4A5F-800D-36DFD97CC466}"/>
+                <a16:creationId xmlns:a16="http://schemas.microsoft.com/office/drawing/2014/main" id="{9FBE52EA-C450-41A8-960A-B94B26E78B79}"/>
               </a:ext>
             </a:extLst>
           </p:cNvPr>
@@ -10063,7 +10071,7 @@
           <p:cNvPr id="2" name="">
             <a:extLst xmlns:a="http://schemas.openxmlformats.org/drawingml/2006/main">
               <a:ext uri="{FF2B5EF4-FFF2-40B4-BE49-F238E27FC236}">
-                <a16:creationId xmlns:a16="http://schemas.microsoft.com/office/drawing/2014/main" id="{C2FE9098-1D6E-43F3-BD94-749996BA6AC8}"/>
+                <a16:creationId xmlns:a16="http://schemas.microsoft.com/office/drawing/2014/main" id="{05F7469C-E6DA-4D86-9E4D-07903CB9FFAE}"/>
               </a:ext>
             </a:extLst>
           </p:cNvPr>
@@ -10120,7 +10128,7 @@
           <p:cNvPr id="3" name="">
             <a:extLst xmlns:a="http://schemas.openxmlformats.org/drawingml/2006/main">
               <a:ext uri="{FF2B5EF4-FFF2-40B4-BE49-F238E27FC236}">
-                <a16:creationId xmlns:a16="http://schemas.microsoft.com/office/drawing/2014/main" id="{4801B97E-552E-4702-A135-E624691A5528}"/>
+                <a16:creationId xmlns:a16="http://schemas.microsoft.com/office/drawing/2014/main" id="{16A8A255-85A4-43D4-B08B-A18EA0986EB3}"/>
               </a:ext>
             </a:extLst>
           </p:cNvPr>
@@ -10152,7 +10160,7 @@
           <p:cNvPr id="4" name="">
             <a:extLst xmlns:a="http://schemas.openxmlformats.org/drawingml/2006/main">
               <a:ext uri="{FF2B5EF4-FFF2-40B4-BE49-F238E27FC236}">
-                <a16:creationId xmlns:a16="http://schemas.microsoft.com/office/drawing/2014/main" id="{2595C5D3-7956-4DA3-80C8-3D0E23847805}"/>
+                <a16:creationId xmlns:a16="http://schemas.microsoft.com/office/drawing/2014/main" id="{EC9AE4F8-A6DB-42A4-B242-47471711AA5D}"/>
               </a:ext>
             </a:extLst>
           </p:cNvPr>
@@ -10209,7 +10217,7 @@
           <p:cNvPr id="5" name="">
             <a:extLst xmlns:a="http://schemas.openxmlformats.org/drawingml/2006/main">
               <a:ext uri="{FF2B5EF4-FFF2-40B4-BE49-F238E27FC236}">
-                <a16:creationId xmlns:a16="http://schemas.microsoft.com/office/drawing/2014/main" id="{256C80DC-079D-47F7-92A6-3B313D14D1C4}"/>
+                <a16:creationId xmlns:a16="http://schemas.microsoft.com/office/drawing/2014/main" id="{8579D92A-8437-419E-A26A-A1B17B5DFB56}"/>
               </a:ext>
             </a:extLst>
           </p:cNvPr>
@@ -10266,7 +10274,7 @@
           <p:cNvPr id="6" name="">
             <a:extLst xmlns:a="http://schemas.openxmlformats.org/drawingml/2006/main">
               <a:ext uri="{FF2B5EF4-FFF2-40B4-BE49-F238E27FC236}">
-                <a16:creationId xmlns:a16="http://schemas.microsoft.com/office/drawing/2014/main" id="{7D4D929C-3209-47C7-BB9E-A01AC6DD4F36}"/>
+                <a16:creationId xmlns:a16="http://schemas.microsoft.com/office/drawing/2014/main" id="{03AFDD37-A339-44EC-AB77-3012CC580715}"/>
               </a:ext>
             </a:extLst>
           </p:cNvPr>
@@ -10323,7 +10331,7 @@
           <p:cNvPr id="7" name="">
             <a:extLst xmlns:a="http://schemas.openxmlformats.org/drawingml/2006/main">
               <a:ext uri="{FF2B5EF4-FFF2-40B4-BE49-F238E27FC236}">
-                <a16:creationId xmlns:a16="http://schemas.microsoft.com/office/drawing/2014/main" id="{0D9B2C9A-5955-4361-81D5-0C2689F12D67}"/>
+                <a16:creationId xmlns:a16="http://schemas.microsoft.com/office/drawing/2014/main" id="{BA3D223C-89D0-4607-8BA3-E096DA5C32F8}"/>
               </a:ext>
             </a:extLst>
           </p:cNvPr>
@@ -10355,7 +10363,7 @@
           <p:cNvPr id="8" name="">
             <a:extLst xmlns:a="http://schemas.openxmlformats.org/drawingml/2006/main">
               <a:ext uri="{FF2B5EF4-FFF2-40B4-BE49-F238E27FC236}">
-                <a16:creationId xmlns:a16="http://schemas.microsoft.com/office/drawing/2014/main" id="{62F52CC5-FF94-462A-92D3-4F2A2151CF50}"/>
+                <a16:creationId xmlns:a16="http://schemas.microsoft.com/office/drawing/2014/main" id="{A2E2AEAF-35EE-4E6A-991C-6E9BC9EA4B46}"/>
               </a:ext>
             </a:extLst>
           </p:cNvPr>
@@ -10412,7 +10420,7 @@
           <p:cNvPr id="9" name="">
             <a:extLst xmlns:a="http://schemas.openxmlformats.org/drawingml/2006/main">
               <a:ext uri="{FF2B5EF4-FFF2-40B4-BE49-F238E27FC236}">
-                <a16:creationId xmlns:a16="http://schemas.microsoft.com/office/drawing/2014/main" id="{B8394FDB-E5D8-4BEF-9FB9-FAE68318B9A2}"/>
+                <a16:creationId xmlns:a16="http://schemas.microsoft.com/office/drawing/2014/main" id="{3D177587-8532-4BB1-9F77-CB2EA5842602}"/>
               </a:ext>
             </a:extLst>
           </p:cNvPr>
@@ -10469,7 +10477,7 @@
           <p:cNvPr id="10" name="">
             <a:extLst xmlns:a="http://schemas.openxmlformats.org/drawingml/2006/main">
               <a:ext uri="{FF2B5EF4-FFF2-40B4-BE49-F238E27FC236}">
-                <a16:creationId xmlns:a16="http://schemas.microsoft.com/office/drawing/2014/main" id="{3B2F0A93-CD23-41A3-B94F-DC0841D678E5}"/>
+                <a16:creationId xmlns:a16="http://schemas.microsoft.com/office/drawing/2014/main" id="{9D119EB9-65D2-4CD6-BD9C-9FBECFE8F443}"/>
               </a:ext>
             </a:extLst>
           </p:cNvPr>
@@ -10526,7 +10534,7 @@
           <p:cNvPr id="11" name="">
             <a:extLst xmlns:a="http://schemas.openxmlformats.org/drawingml/2006/main">
               <a:ext uri="{FF2B5EF4-FFF2-40B4-BE49-F238E27FC236}">
-                <a16:creationId xmlns:a16="http://schemas.microsoft.com/office/drawing/2014/main" id="{731D1781-680D-4543-B312-2BD8F39DB598}"/>
+                <a16:creationId xmlns:a16="http://schemas.microsoft.com/office/drawing/2014/main" id="{1E95C76B-2062-4FEF-8142-4B1CC51326C7}"/>
               </a:ext>
             </a:extLst>
           </p:cNvPr>
@@ -10583,7 +10591,7 @@
           <p:cNvPr id="12" name="">
             <a:extLst xmlns:a="http://schemas.openxmlformats.org/drawingml/2006/main">
               <a:ext uri="{FF2B5EF4-FFF2-40B4-BE49-F238E27FC236}">
-                <a16:creationId xmlns:a16="http://schemas.microsoft.com/office/drawing/2014/main" id="{1417254A-1AC0-41B8-921B-21D4ACDB36BF}"/>
+                <a16:creationId xmlns:a16="http://schemas.microsoft.com/office/drawing/2014/main" id="{1F441D28-BFC0-41EE-9CF6-78063DEB25D5}"/>
               </a:ext>
             </a:extLst>
           </p:cNvPr>
@@ -10640,7 +10648,7 @@
           <p:cNvPr id="13" name="">
             <a:extLst xmlns:a="http://schemas.openxmlformats.org/drawingml/2006/main">
               <a:ext uri="{FF2B5EF4-FFF2-40B4-BE49-F238E27FC236}">
-                <a16:creationId xmlns:a16="http://schemas.microsoft.com/office/drawing/2014/main" id="{14AA4E2D-77FF-43E3-80CA-E09B03110100}"/>
+                <a16:creationId xmlns:a16="http://schemas.microsoft.com/office/drawing/2014/main" id="{AA6C2820-C943-41D9-BE2D-8ADD2461F6E4}"/>
               </a:ext>
             </a:extLst>
           </p:cNvPr>
@@ -10697,7 +10705,7 @@
           <p:cNvPr id="14" name="">
             <a:extLst xmlns:a="http://schemas.openxmlformats.org/drawingml/2006/main">
               <a:ext uri="{FF2B5EF4-FFF2-40B4-BE49-F238E27FC236}">
-                <a16:creationId xmlns:a16="http://schemas.microsoft.com/office/drawing/2014/main" id="{02BF645D-F0A3-40FB-95F3-BB6D461554F2}"/>
+                <a16:creationId xmlns:a16="http://schemas.microsoft.com/office/drawing/2014/main" id="{47B770AF-687F-4CE2-968D-4B631A2F4DBB}"/>
               </a:ext>
             </a:extLst>
           </p:cNvPr>
@@ -10754,7 +10762,7 @@
           <p:cNvPr id="15" name="">
             <a:extLst xmlns:a="http://schemas.openxmlformats.org/drawingml/2006/main">
               <a:ext uri="{FF2B5EF4-FFF2-40B4-BE49-F238E27FC236}">
-                <a16:creationId xmlns:a16="http://schemas.microsoft.com/office/drawing/2014/main" id="{BA513F8E-FC62-4143-931B-1FBB274AB5FB}"/>
+                <a16:creationId xmlns:a16="http://schemas.microsoft.com/office/drawing/2014/main" id="{DF999CAC-19B2-4A8F-AF74-2902C531760B}"/>
               </a:ext>
             </a:extLst>
           </p:cNvPr>
@@ -10809,7 +10817,7 @@
     </p:spTree>
     <p:extLst>
       <p:ext uri="{BB962C8B-B14F-4D97-AF65-F5344CB8AC3E}">
-        <p14:creationId xmlns:p14="http://schemas.microsoft.com/office/powerpoint/2010/main" val="1213485637"/>
+        <p14:creationId xmlns:p14="http://schemas.microsoft.com/office/powerpoint/2010/main" val="1721513290"/>
       </p:ext>
     </p:extLst>
   </p:cSld>
@@ -10964,7 +10972,7 @@
           <p:cNvPr id="16" name="">
             <a:extLst xmlns:a="http://schemas.openxmlformats.org/drawingml/2006/main">
               <a:ext uri="{FF2B5EF4-FFF2-40B4-BE49-F238E27FC236}">
-                <a16:creationId xmlns:a16="http://schemas.microsoft.com/office/drawing/2014/main" id="{1F5705FF-E1BC-4063-B888-F80EB18E4326}"/>
+                <a16:creationId xmlns:a16="http://schemas.microsoft.com/office/drawing/2014/main" id="{7BCA0CFB-32A9-4F0C-9C64-1B7640B74757}"/>
               </a:ext>
             </a:extLst>
           </p:cNvPr>
@@ -10996,7 +11004,7 @@
           <p:cNvPr id="2" name="">
             <a:extLst xmlns:a="http://schemas.openxmlformats.org/drawingml/2006/main">
               <a:ext uri="{FF2B5EF4-FFF2-40B4-BE49-F238E27FC236}">
-                <a16:creationId xmlns:a16="http://schemas.microsoft.com/office/drawing/2014/main" id="{53D761B7-3197-406C-8484-BF30AE290EA4}"/>
+                <a16:creationId xmlns:a16="http://schemas.microsoft.com/office/drawing/2014/main" id="{CA4A9536-FBF0-4EA1-84AA-7369A92C9F2B}"/>
               </a:ext>
             </a:extLst>
           </p:cNvPr>
@@ -11053,7 +11061,7 @@
           <p:cNvPr id="3" name="">
             <a:extLst xmlns:a="http://schemas.openxmlformats.org/drawingml/2006/main">
               <a:ext uri="{FF2B5EF4-FFF2-40B4-BE49-F238E27FC236}">
-                <a16:creationId xmlns:a16="http://schemas.microsoft.com/office/drawing/2014/main" id="{B468D5F4-B34D-43E1-82C1-63DE053C512E}"/>
+                <a16:creationId xmlns:a16="http://schemas.microsoft.com/office/drawing/2014/main" id="{01559343-5543-44FC-B31F-088A65125A97}"/>
               </a:ext>
             </a:extLst>
           </p:cNvPr>
@@ -11085,7 +11093,7 @@
           <p:cNvPr id="4" name="">
             <a:extLst xmlns:a="http://schemas.openxmlformats.org/drawingml/2006/main">
               <a:ext uri="{FF2B5EF4-FFF2-40B4-BE49-F238E27FC236}">
-                <a16:creationId xmlns:a16="http://schemas.microsoft.com/office/drawing/2014/main" id="{6EA8A36D-61AB-41AA-A460-66011966DE0C}"/>
+                <a16:creationId xmlns:a16="http://schemas.microsoft.com/office/drawing/2014/main" id="{81684871-07DA-47BC-A935-B799E5B13848}"/>
               </a:ext>
             </a:extLst>
           </p:cNvPr>
@@ -11142,7 +11150,7 @@
           <p:cNvPr id="5" name="">
             <a:extLst xmlns:a="http://schemas.openxmlformats.org/drawingml/2006/main">
               <a:ext uri="{FF2B5EF4-FFF2-40B4-BE49-F238E27FC236}">
-                <a16:creationId xmlns:a16="http://schemas.microsoft.com/office/drawing/2014/main" id="{26FAFEF5-6798-4034-BC42-BA89F89B69CC}"/>
+                <a16:creationId xmlns:a16="http://schemas.microsoft.com/office/drawing/2014/main" id="{FB057A00-1AAA-48D6-B022-EA637FAD685D}"/>
               </a:ext>
             </a:extLst>
           </p:cNvPr>
@@ -11199,7 +11207,7 @@
           <p:cNvPr id="6" name="">
             <a:extLst xmlns:a="http://schemas.openxmlformats.org/drawingml/2006/main">
               <a:ext uri="{FF2B5EF4-FFF2-40B4-BE49-F238E27FC236}">
-                <a16:creationId xmlns:a16="http://schemas.microsoft.com/office/drawing/2014/main" id="{71658D2F-6B6F-419B-840F-4A5CBDD86DC1}"/>
+                <a16:creationId xmlns:a16="http://schemas.microsoft.com/office/drawing/2014/main" id="{A878656A-6171-4D0F-A72C-2E34EE075A01}"/>
               </a:ext>
             </a:extLst>
           </p:cNvPr>
@@ -11256,7 +11264,7 @@
           <p:cNvPr id="7" name="">
             <a:extLst xmlns:a="http://schemas.openxmlformats.org/drawingml/2006/main">
               <a:ext uri="{FF2B5EF4-FFF2-40B4-BE49-F238E27FC236}">
-                <a16:creationId xmlns:a16="http://schemas.microsoft.com/office/drawing/2014/main" id="{24F37215-A33A-4307-BB94-FDBF4AC62006}"/>
+                <a16:creationId xmlns:a16="http://schemas.microsoft.com/office/drawing/2014/main" id="{44647B95-0E65-422B-87CF-11FA2B371A4E}"/>
               </a:ext>
             </a:extLst>
           </p:cNvPr>
@@ -11288,7 +11296,7 @@
           <p:cNvPr id="8" name="">
             <a:extLst xmlns:a="http://schemas.openxmlformats.org/drawingml/2006/main">
               <a:ext uri="{FF2B5EF4-FFF2-40B4-BE49-F238E27FC236}">
-                <a16:creationId xmlns:a16="http://schemas.microsoft.com/office/drawing/2014/main" id="{297B2747-D5B1-4688-AF6C-5AE2766EEFF3}"/>
+                <a16:creationId xmlns:a16="http://schemas.microsoft.com/office/drawing/2014/main" id="{54C20A66-5B6F-415A-82AC-DD8C6452F127}"/>
               </a:ext>
             </a:extLst>
           </p:cNvPr>
@@ -11345,7 +11353,7 @@
           <p:cNvPr id="9" name="">
             <a:extLst xmlns:a="http://schemas.openxmlformats.org/drawingml/2006/main">
               <a:ext uri="{FF2B5EF4-FFF2-40B4-BE49-F238E27FC236}">
-                <a16:creationId xmlns:a16="http://schemas.microsoft.com/office/drawing/2014/main" id="{E92AF864-47EB-47AA-A79A-B0E8E67A62A1}"/>
+                <a16:creationId xmlns:a16="http://schemas.microsoft.com/office/drawing/2014/main" id="{EFC71ACA-E2F9-49B3-8663-56582307FF92}"/>
               </a:ext>
             </a:extLst>
           </p:cNvPr>
@@ -11406,7 +11414,7 @@
           <p:nvPr/>
         </p:nvPicPr>
         <p:blipFill>
-          <a:blip xmlns:r="http://schemas.openxmlformats.org/officeDocument/2006/relationships" xmlns:a="http://schemas.openxmlformats.org/drawingml/2006/main" r:embed="Rf399ce44303043b2"/>
+          <a:blip xmlns:r="http://schemas.openxmlformats.org/officeDocument/2006/relationships" xmlns:a="http://schemas.openxmlformats.org/drawingml/2006/main" r:embed="Ra3d5e78f1c214ea0"/>
           <a:stretch xmlns:a="http://schemas.openxmlformats.org/drawingml/2006/main"/>
         </p:blipFill>
         <p:spPr>
@@ -11424,7 +11432,7 @@
           <p:cNvPr id="11" name="">
             <a:extLst xmlns:a="http://schemas.openxmlformats.org/drawingml/2006/main">
               <a:ext uri="{FF2B5EF4-FFF2-40B4-BE49-F238E27FC236}">
-                <a16:creationId xmlns:a16="http://schemas.microsoft.com/office/drawing/2014/main" id="{7BA94C4A-25B3-4743-AE05-BD0AD1A5FD23}"/>
+                <a16:creationId xmlns:a16="http://schemas.microsoft.com/office/drawing/2014/main" id="{9B280025-5C11-4802-80CD-5B3C37AAC880}"/>
               </a:ext>
             </a:extLst>
           </p:cNvPr>
@@ -11481,7 +11489,7 @@
           <p:cNvPr id="12" name="">
             <a:extLst xmlns:a="http://schemas.openxmlformats.org/drawingml/2006/main">
               <a:ext uri="{FF2B5EF4-FFF2-40B4-BE49-F238E27FC236}">
-                <a16:creationId xmlns:a16="http://schemas.microsoft.com/office/drawing/2014/main" id="{45340CAA-D631-408A-A2A5-F78B1482FEEC}"/>
+                <a16:creationId xmlns:a16="http://schemas.microsoft.com/office/drawing/2014/main" id="{599F491D-F120-4A92-9661-53282030FB1C}"/>
               </a:ext>
             </a:extLst>
           </p:cNvPr>
@@ -11538,7 +11546,7 @@
           <p:cNvPr id="13" name="">
             <a:extLst xmlns:a="http://schemas.openxmlformats.org/drawingml/2006/main">
               <a:ext uri="{FF2B5EF4-FFF2-40B4-BE49-F238E27FC236}">
-                <a16:creationId xmlns:a16="http://schemas.microsoft.com/office/drawing/2014/main" id="{83FF2870-0ACC-4412-99D1-1E304955C651}"/>
+                <a16:creationId xmlns:a16="http://schemas.microsoft.com/office/drawing/2014/main" id="{60DAF74C-8549-4F51-84BF-DD1F72806B2D}"/>
               </a:ext>
             </a:extLst>
           </p:cNvPr>
@@ -11570,7 +11578,7 @@
           <p:cNvPr id="14" name="">
             <a:extLst xmlns:a="http://schemas.openxmlformats.org/drawingml/2006/main">
               <a:ext uri="{FF2B5EF4-FFF2-40B4-BE49-F238E27FC236}">
-                <a16:creationId xmlns:a16="http://schemas.microsoft.com/office/drawing/2014/main" id="{804314B2-34B4-4D93-97FE-7B1F63AED01A}"/>
+                <a16:creationId xmlns:a16="http://schemas.microsoft.com/office/drawing/2014/main" id="{5205C9E9-9B5B-44EA-9380-DE1D4E185921}"/>
               </a:ext>
             </a:extLst>
           </p:cNvPr>
@@ -11627,7 +11635,7 @@
           <p:cNvPr id="15" name="">
             <a:extLst xmlns:a="http://schemas.openxmlformats.org/drawingml/2006/main">
               <a:ext uri="{FF2B5EF4-FFF2-40B4-BE49-F238E27FC236}">
-                <a16:creationId xmlns:a16="http://schemas.microsoft.com/office/drawing/2014/main" id="{4135464D-8EFD-4BC9-BEC6-E48BAAB5C417}"/>
+                <a16:creationId xmlns:a16="http://schemas.microsoft.com/office/drawing/2014/main" id="{6DF89447-97FF-499F-BAE7-BFF14C73635C}"/>
               </a:ext>
             </a:extLst>
           </p:cNvPr>
@@ -11682,7 +11690,7 @@
     </p:spTree>
     <p:extLst>
       <p:ext uri="{BB962C8B-B14F-4D97-AF65-F5344CB8AC3E}">
-        <p14:creationId xmlns:p14="http://schemas.microsoft.com/office/powerpoint/2010/main" val="1397306412"/>
+        <p14:creationId xmlns:p14="http://schemas.microsoft.com/office/powerpoint/2010/main" val="1580971520"/>
       </p:ext>
     </p:extLst>
   </p:cSld>
@@ -11837,7 +11845,7 @@
           <p:cNvPr id="23" name="">
             <a:extLst xmlns:a="http://schemas.openxmlformats.org/drawingml/2006/main">
               <a:ext uri="{FF2B5EF4-FFF2-40B4-BE49-F238E27FC236}">
-                <a16:creationId xmlns:a16="http://schemas.microsoft.com/office/drawing/2014/main" id="{24CDCDAA-B059-4186-B826-F61906833AEF}"/>
+                <a16:creationId xmlns:a16="http://schemas.microsoft.com/office/drawing/2014/main" id="{E1D80ECE-4541-46DA-88B2-6EF824034624}"/>
               </a:ext>
             </a:extLst>
           </p:cNvPr>
@@ -11869,7 +11877,7 @@
           <p:cNvPr id="2" name="">
             <a:extLst xmlns:a="http://schemas.openxmlformats.org/drawingml/2006/main">
               <a:ext uri="{FF2B5EF4-FFF2-40B4-BE49-F238E27FC236}">
-                <a16:creationId xmlns:a16="http://schemas.microsoft.com/office/drawing/2014/main" id="{FABFEED5-B05C-4AB7-BD94-07BDCAEE0660}"/>
+                <a16:creationId xmlns:a16="http://schemas.microsoft.com/office/drawing/2014/main" id="{D2D519D7-F0DE-444E-A4AA-0E6C92C34DF8}"/>
               </a:ext>
             </a:extLst>
           </p:cNvPr>
@@ -11926,7 +11934,7 @@
           <p:cNvPr id="3" name="">
             <a:extLst xmlns:a="http://schemas.openxmlformats.org/drawingml/2006/main">
               <a:ext uri="{FF2B5EF4-FFF2-40B4-BE49-F238E27FC236}">
-                <a16:creationId xmlns:a16="http://schemas.microsoft.com/office/drawing/2014/main" id="{6157EC89-8EC0-40B9-979B-D0252A777018}"/>
+                <a16:creationId xmlns:a16="http://schemas.microsoft.com/office/drawing/2014/main" id="{18CC7BAC-38BF-4C52-8F26-57041E7C181D}"/>
               </a:ext>
             </a:extLst>
           </p:cNvPr>
@@ -11958,7 +11966,7 @@
           <p:cNvPr id="4" name="">
             <a:extLst xmlns:a="http://schemas.openxmlformats.org/drawingml/2006/main">
               <a:ext uri="{FF2B5EF4-FFF2-40B4-BE49-F238E27FC236}">
-                <a16:creationId xmlns:a16="http://schemas.microsoft.com/office/drawing/2014/main" id="{AFF9B851-126D-4F97-A399-6D368096FD8C}"/>
+                <a16:creationId xmlns:a16="http://schemas.microsoft.com/office/drawing/2014/main" id="{20C719E2-EBE5-4424-9ABC-4AEB136D498A}"/>
               </a:ext>
             </a:extLst>
           </p:cNvPr>
@@ -12015,7 +12023,7 @@
           <p:cNvPr id="5" name="">
             <a:extLst xmlns:a="http://schemas.openxmlformats.org/drawingml/2006/main">
               <a:ext uri="{FF2B5EF4-FFF2-40B4-BE49-F238E27FC236}">
-                <a16:creationId xmlns:a16="http://schemas.microsoft.com/office/drawing/2014/main" id="{DE44D8EF-4395-46C2-A7D6-8C317164730D}"/>
+                <a16:creationId xmlns:a16="http://schemas.microsoft.com/office/drawing/2014/main" id="{B260B72B-B057-4958-90C6-E4A98E7D68FF}"/>
               </a:ext>
             </a:extLst>
           </p:cNvPr>
@@ -12072,7 +12080,7 @@
           <p:cNvPr id="6" name="">
             <a:extLst xmlns:a="http://schemas.openxmlformats.org/drawingml/2006/main">
               <a:ext uri="{FF2B5EF4-FFF2-40B4-BE49-F238E27FC236}">
-                <a16:creationId xmlns:a16="http://schemas.microsoft.com/office/drawing/2014/main" id="{272607AD-42C7-4D41-AFFF-8629DAC380E4}"/>
+                <a16:creationId xmlns:a16="http://schemas.microsoft.com/office/drawing/2014/main" id="{65AC8CCF-0F4E-4305-845B-8A81E19B513A}"/>
               </a:ext>
             </a:extLst>
           </p:cNvPr>
@@ -12129,7 +12137,7 @@
           <p:cNvPr id="7" name="">
             <a:extLst xmlns:a="http://schemas.openxmlformats.org/drawingml/2006/main">
               <a:ext uri="{FF2B5EF4-FFF2-40B4-BE49-F238E27FC236}">
-                <a16:creationId xmlns:a16="http://schemas.microsoft.com/office/drawing/2014/main" id="{7CF220A5-6DE3-4494-9CE1-D2D24B62804C}"/>
+                <a16:creationId xmlns:a16="http://schemas.microsoft.com/office/drawing/2014/main" id="{DBE47405-6554-4CCA-BA8C-33B37F2AB807}"/>
               </a:ext>
             </a:extLst>
           </p:cNvPr>
@@ -12161,7 +12169,7 @@
           <p:cNvPr id="8" name="">
             <a:extLst xmlns:a="http://schemas.openxmlformats.org/drawingml/2006/main">
               <a:ext uri="{FF2B5EF4-FFF2-40B4-BE49-F238E27FC236}">
-                <a16:creationId xmlns:a16="http://schemas.microsoft.com/office/drawing/2014/main" id="{D978042E-B02F-47CA-9393-7D07B64AA19A}"/>
+                <a16:creationId xmlns:a16="http://schemas.microsoft.com/office/drawing/2014/main" id="{D4B87826-8FEB-40B7-AD18-7F0CFF9782E7}"/>
               </a:ext>
             </a:extLst>
           </p:cNvPr>
@@ -12218,7 +12226,7 @@
           <p:cNvPr id="9" name="">
             <a:extLst xmlns:a="http://schemas.openxmlformats.org/drawingml/2006/main">
               <a:ext uri="{FF2B5EF4-FFF2-40B4-BE49-F238E27FC236}">
-                <a16:creationId xmlns:a16="http://schemas.microsoft.com/office/drawing/2014/main" id="{A97696BB-D742-4648-BF05-61E96017DE2C}"/>
+                <a16:creationId xmlns:a16="http://schemas.microsoft.com/office/drawing/2014/main" id="{63D1CEEB-F3EB-449F-B74D-71352573DB81}"/>
               </a:ext>
             </a:extLst>
           </p:cNvPr>
@@ -12275,7 +12283,7 @@
           <p:cNvPr id="10" name="">
             <a:extLst xmlns:a="http://schemas.openxmlformats.org/drawingml/2006/main">
               <a:ext uri="{FF2B5EF4-FFF2-40B4-BE49-F238E27FC236}">
-                <a16:creationId xmlns:a16="http://schemas.microsoft.com/office/drawing/2014/main" id="{1AD65067-C4C5-4C88-96E9-68EAB8E79035}"/>
+                <a16:creationId xmlns:a16="http://schemas.microsoft.com/office/drawing/2014/main" id="{92F9A550-1005-42F7-932D-003E4EB16627}"/>
               </a:ext>
             </a:extLst>
           </p:cNvPr>
@@ -12309,7 +12317,7 @@
           <p:cNvPr id="11" name="">
             <a:extLst xmlns:a="http://schemas.openxmlformats.org/drawingml/2006/main">
               <a:ext uri="{FF2B5EF4-FFF2-40B4-BE49-F238E27FC236}">
-                <a16:creationId xmlns:a16="http://schemas.microsoft.com/office/drawing/2014/main" id="{564EE2B0-835E-4894-BDD8-ACE3CBB719DA}"/>
+                <a16:creationId xmlns:a16="http://schemas.microsoft.com/office/drawing/2014/main" id="{3B7A53DF-EA21-464D-9FCD-F8AA93532D90}"/>
               </a:ext>
             </a:extLst>
           </p:cNvPr>
@@ -12341,7 +12349,7 @@
           <p:cNvPr id="12" name="">
             <a:extLst xmlns:a="http://schemas.openxmlformats.org/drawingml/2006/main">
               <a:ext uri="{FF2B5EF4-FFF2-40B4-BE49-F238E27FC236}">
-                <a16:creationId xmlns:a16="http://schemas.microsoft.com/office/drawing/2014/main" id="{F3A64621-40D9-4C75-AE6C-F7BD226B93F7}"/>
+                <a16:creationId xmlns:a16="http://schemas.microsoft.com/office/drawing/2014/main" id="{89502543-162A-4E7B-B1AD-6C62B12AA284}"/>
               </a:ext>
             </a:extLst>
           </p:cNvPr>
@@ -12398,7 +12406,7 @@
           <p:cNvPr id="13" name="">
             <a:extLst xmlns:a="http://schemas.openxmlformats.org/drawingml/2006/main">
               <a:ext uri="{FF2B5EF4-FFF2-40B4-BE49-F238E27FC236}">
-                <a16:creationId xmlns:a16="http://schemas.microsoft.com/office/drawing/2014/main" id="{4A17CA5C-BD8B-4AE6-BE41-E53E033C1BEF}"/>
+                <a16:creationId xmlns:a16="http://schemas.microsoft.com/office/drawing/2014/main" id="{F831B29B-ED69-4465-B1D4-792AA384DD32}"/>
               </a:ext>
             </a:extLst>
           </p:cNvPr>
@@ -12455,7 +12463,7 @@
           <p:cNvPr id="14" name="">
             <a:extLst xmlns:a="http://schemas.openxmlformats.org/drawingml/2006/main">
               <a:ext uri="{FF2B5EF4-FFF2-40B4-BE49-F238E27FC236}">
-                <a16:creationId xmlns:a16="http://schemas.microsoft.com/office/drawing/2014/main" id="{A9D68362-9AEB-43EC-BDD2-6A004543A49B}"/>
+                <a16:creationId xmlns:a16="http://schemas.microsoft.com/office/drawing/2014/main" id="{921FD156-6A42-4C4F-96AF-5301B6F8960D}"/>
               </a:ext>
             </a:extLst>
           </p:cNvPr>
@@ -12489,7 +12497,7 @@
           <p:cNvPr id="15" name="">
             <a:extLst xmlns:a="http://schemas.openxmlformats.org/drawingml/2006/main">
               <a:ext uri="{FF2B5EF4-FFF2-40B4-BE49-F238E27FC236}">
-                <a16:creationId xmlns:a16="http://schemas.microsoft.com/office/drawing/2014/main" id="{27DC5E40-BBC8-4CA7-A2C7-92F3CCC0E1B2}"/>
+                <a16:creationId xmlns:a16="http://schemas.microsoft.com/office/drawing/2014/main" id="{45C5FBFA-ACEF-480A-8F22-4FFA29102B69}"/>
               </a:ext>
             </a:extLst>
           </p:cNvPr>
@@ -12521,7 +12529,7 @@
           <p:cNvPr id="16" name="">
             <a:extLst xmlns:a="http://schemas.openxmlformats.org/drawingml/2006/main">
               <a:ext uri="{FF2B5EF4-FFF2-40B4-BE49-F238E27FC236}">
-                <a16:creationId xmlns:a16="http://schemas.microsoft.com/office/drawing/2014/main" id="{2D00908D-0130-4633-B31A-FE83F0215F4E}"/>
+                <a16:creationId xmlns:a16="http://schemas.microsoft.com/office/drawing/2014/main" id="{27433AFD-30FB-4FC9-8E23-1EEC27EC57BC}"/>
               </a:ext>
             </a:extLst>
           </p:cNvPr>
@@ -12578,7 +12586,7 @@
           <p:cNvPr id="17" name="">
             <a:extLst xmlns:a="http://schemas.openxmlformats.org/drawingml/2006/main">
               <a:ext uri="{FF2B5EF4-FFF2-40B4-BE49-F238E27FC236}">
-                <a16:creationId xmlns:a16="http://schemas.microsoft.com/office/drawing/2014/main" id="{0119E0EB-FE01-44CA-837D-4069891BA3EA}"/>
+                <a16:creationId xmlns:a16="http://schemas.microsoft.com/office/drawing/2014/main" id="{DA515559-4EB5-433B-A406-FE8E33A79488}"/>
               </a:ext>
             </a:extLst>
           </p:cNvPr>
@@ -12635,7 +12643,7 @@
           <p:cNvPr id="18" name="">
             <a:extLst xmlns:a="http://schemas.openxmlformats.org/drawingml/2006/main">
               <a:ext uri="{FF2B5EF4-FFF2-40B4-BE49-F238E27FC236}">
-                <a16:creationId xmlns:a16="http://schemas.microsoft.com/office/drawing/2014/main" id="{126CE84F-961E-4E76-A970-21713A822BD1}"/>
+                <a16:creationId xmlns:a16="http://schemas.microsoft.com/office/drawing/2014/main" id="{4AA98779-1F06-4527-A66D-17D09DE13065}"/>
               </a:ext>
             </a:extLst>
           </p:cNvPr>
@@ -12669,7 +12677,7 @@
           <p:cNvPr id="19" name="">
             <a:extLst xmlns:a="http://schemas.openxmlformats.org/drawingml/2006/main">
               <a:ext uri="{FF2B5EF4-FFF2-40B4-BE49-F238E27FC236}">
-                <a16:creationId xmlns:a16="http://schemas.microsoft.com/office/drawing/2014/main" id="{38966420-BF5C-4B39-B54E-4DBDBD6C3AEC}"/>
+                <a16:creationId xmlns:a16="http://schemas.microsoft.com/office/drawing/2014/main" id="{7F2F62A0-3A51-4287-AFD4-736DBBE680F9}"/>
               </a:ext>
             </a:extLst>
           </p:cNvPr>
@@ -12701,7 +12709,7 @@
           <p:cNvPr id="20" name="">
             <a:extLst xmlns:a="http://schemas.openxmlformats.org/drawingml/2006/main">
               <a:ext uri="{FF2B5EF4-FFF2-40B4-BE49-F238E27FC236}">
-                <a16:creationId xmlns:a16="http://schemas.microsoft.com/office/drawing/2014/main" id="{FEF4CE27-EA46-4FD9-B315-0B9668926BF3}"/>
+                <a16:creationId xmlns:a16="http://schemas.microsoft.com/office/drawing/2014/main" id="{1C001E87-3B9A-4154-8412-1C25C8D83E31}"/>
               </a:ext>
             </a:extLst>
           </p:cNvPr>
@@ -12758,7 +12766,7 @@
           <p:cNvPr id="21" name="">
             <a:extLst xmlns:a="http://schemas.openxmlformats.org/drawingml/2006/main">
               <a:ext uri="{FF2B5EF4-FFF2-40B4-BE49-F238E27FC236}">
-                <a16:creationId xmlns:a16="http://schemas.microsoft.com/office/drawing/2014/main" id="{E95C0336-37B8-43F5-89C6-BC31017F3119}"/>
+                <a16:creationId xmlns:a16="http://schemas.microsoft.com/office/drawing/2014/main" id="{ECFBF1F2-C1E7-4B99-A890-1A3FEB232F4A}"/>
               </a:ext>
             </a:extLst>
           </p:cNvPr>
@@ -12815,7 +12823,7 @@
           <p:cNvPr id="22" name="">
             <a:extLst xmlns:a="http://schemas.openxmlformats.org/drawingml/2006/main">
               <a:ext uri="{FF2B5EF4-FFF2-40B4-BE49-F238E27FC236}">
-                <a16:creationId xmlns:a16="http://schemas.microsoft.com/office/drawing/2014/main" id="{10570959-74AB-42E2-8B12-B59FAAE9FE17}"/>
+                <a16:creationId xmlns:a16="http://schemas.microsoft.com/office/drawing/2014/main" id="{8857953C-13F1-423A-8424-6D614D5168EE}"/>
               </a:ext>
             </a:extLst>
           </p:cNvPr>
@@ -12870,7 +12878,7 @@
     </p:spTree>
     <p:extLst>
       <p:ext uri="{BB962C8B-B14F-4D97-AF65-F5344CB8AC3E}">
-        <p14:creationId xmlns:p14="http://schemas.microsoft.com/office/powerpoint/2010/main" val="1590674826"/>
+        <p14:creationId xmlns:p14="http://schemas.microsoft.com/office/powerpoint/2010/main" val="546119472"/>
       </p:ext>
     </p:extLst>
   </p:cSld>
@@ -13071,7 +13079,7 @@
           <p:cNvPr id="22" name="">
             <a:extLst xmlns:a="http://schemas.openxmlformats.org/drawingml/2006/main">
               <a:ext uri="{FF2B5EF4-FFF2-40B4-BE49-F238E27FC236}">
-                <a16:creationId xmlns:a16="http://schemas.microsoft.com/office/drawing/2014/main" id="{FFD3ED89-F05E-42E3-94D6-971B15E21F82}"/>
+                <a16:creationId xmlns:a16="http://schemas.microsoft.com/office/drawing/2014/main" id="{E97EC3C4-5AA4-4626-80D6-41FE173EB801}"/>
               </a:ext>
             </a:extLst>
           </p:cNvPr>
@@ -13103,7 +13111,7 @@
           <p:cNvPr id="2" name="">
             <a:extLst xmlns:a="http://schemas.openxmlformats.org/drawingml/2006/main">
               <a:ext uri="{FF2B5EF4-FFF2-40B4-BE49-F238E27FC236}">
-                <a16:creationId xmlns:a16="http://schemas.microsoft.com/office/drawing/2014/main" id="{741CA0BF-C8A1-47C9-99E4-EA05E42CCDDC}"/>
+                <a16:creationId xmlns:a16="http://schemas.microsoft.com/office/drawing/2014/main" id="{5B44789A-9A60-4004-BA76-E00E780B9297}"/>
               </a:ext>
             </a:extLst>
           </p:cNvPr>
@@ -13160,7 +13168,7 @@
           <p:cNvPr id="3" name="">
             <a:extLst xmlns:a="http://schemas.openxmlformats.org/drawingml/2006/main">
               <a:ext uri="{FF2B5EF4-FFF2-40B4-BE49-F238E27FC236}">
-                <a16:creationId xmlns:a16="http://schemas.microsoft.com/office/drawing/2014/main" id="{91071D48-4A9D-45AB-8D24-2FF8EDD3E580}"/>
+                <a16:creationId xmlns:a16="http://schemas.microsoft.com/office/drawing/2014/main" id="{DD74E159-7DBB-46C1-AE12-366A8E1BB2FB}"/>
               </a:ext>
             </a:extLst>
           </p:cNvPr>
@@ -13192,7 +13200,7 @@
           <p:cNvPr id="4" name="">
             <a:extLst xmlns:a="http://schemas.openxmlformats.org/drawingml/2006/main">
               <a:ext uri="{FF2B5EF4-FFF2-40B4-BE49-F238E27FC236}">
-                <a16:creationId xmlns:a16="http://schemas.microsoft.com/office/drawing/2014/main" id="{334C73DA-B021-4096-937E-F39BB7CCD086}"/>
+                <a16:creationId xmlns:a16="http://schemas.microsoft.com/office/drawing/2014/main" id="{A8C1065C-EA2D-410C-BBFB-24BDFEC9A0E0}"/>
               </a:ext>
             </a:extLst>
           </p:cNvPr>
@@ -13249,7 +13257,7 @@
           <p:cNvPr id="5" name="">
             <a:extLst xmlns:a="http://schemas.openxmlformats.org/drawingml/2006/main">
               <a:ext uri="{FF2B5EF4-FFF2-40B4-BE49-F238E27FC236}">
-                <a16:creationId xmlns:a16="http://schemas.microsoft.com/office/drawing/2014/main" id="{447BBC8A-6D89-4C0A-A3E1-1074945A56EC}"/>
+                <a16:creationId xmlns:a16="http://schemas.microsoft.com/office/drawing/2014/main" id="{292EF948-0276-465E-B05E-B83294261F97}"/>
               </a:ext>
             </a:extLst>
           </p:cNvPr>
@@ -13306,7 +13314,7 @@
           <p:cNvPr id="6" name="">
             <a:extLst xmlns:a="http://schemas.openxmlformats.org/drawingml/2006/main">
               <a:ext uri="{FF2B5EF4-FFF2-40B4-BE49-F238E27FC236}">
-                <a16:creationId xmlns:a16="http://schemas.microsoft.com/office/drawing/2014/main" id="{E354643A-58A7-4588-8A53-0F6E184EEBCE}"/>
+                <a16:creationId xmlns:a16="http://schemas.microsoft.com/office/drawing/2014/main" id="{8D5B98EB-5484-4BA2-A9F2-FB1D809AC89C}"/>
               </a:ext>
             </a:extLst>
           </p:cNvPr>
@@ -13363,7 +13371,7 @@
           <p:cNvPr id="7" name="">
             <a:extLst xmlns:a="http://schemas.openxmlformats.org/drawingml/2006/main">
               <a:ext uri="{FF2B5EF4-FFF2-40B4-BE49-F238E27FC236}">
-                <a16:creationId xmlns:a16="http://schemas.microsoft.com/office/drawing/2014/main" id="{5FAEBE2D-523C-4455-9ABF-54A6B489A1B4}"/>
+                <a16:creationId xmlns:a16="http://schemas.microsoft.com/office/drawing/2014/main" id="{1FC66C07-FE34-41CE-995A-E639A95CAF08}"/>
               </a:ext>
             </a:extLst>
           </p:cNvPr>
@@ -13395,7 +13403,7 @@
           <p:cNvPr id="8" name="">
             <a:extLst xmlns:a="http://schemas.openxmlformats.org/drawingml/2006/main">
               <a:ext uri="{FF2B5EF4-FFF2-40B4-BE49-F238E27FC236}">
-                <a16:creationId xmlns:a16="http://schemas.microsoft.com/office/drawing/2014/main" id="{532CC5D6-FA50-4311-9BC9-725C145B0FA3}"/>
+                <a16:creationId xmlns:a16="http://schemas.microsoft.com/office/drawing/2014/main" id="{2BE8B372-C8C7-4F52-B77E-EB038E0A9CBF}"/>
               </a:ext>
             </a:extLst>
           </p:cNvPr>
@@ -13452,7 +13460,7 @@
           <p:cNvPr id="9" name="">
             <a:extLst xmlns:a="http://schemas.openxmlformats.org/drawingml/2006/main">
               <a:ext uri="{FF2B5EF4-FFF2-40B4-BE49-F238E27FC236}">
-                <a16:creationId xmlns:a16="http://schemas.microsoft.com/office/drawing/2014/main" id="{53F009AB-3FF9-445A-A5C7-F02894BBA5B7}"/>
+                <a16:creationId xmlns:a16="http://schemas.microsoft.com/office/drawing/2014/main" id="{F3515BC6-C566-47E6-A243-3AEFD9930E9D}"/>
               </a:ext>
             </a:extLst>
           </p:cNvPr>
@@ -13509,7 +13517,7 @@
           <p:cNvPr id="10" name="">
             <a:extLst xmlns:a="http://schemas.openxmlformats.org/drawingml/2006/main">
               <a:ext uri="{FF2B5EF4-FFF2-40B4-BE49-F238E27FC236}">
-                <a16:creationId xmlns:a16="http://schemas.microsoft.com/office/drawing/2014/main" id="{5559B875-2D21-4650-87EB-55DC16DA0D9F}"/>
+                <a16:creationId xmlns:a16="http://schemas.microsoft.com/office/drawing/2014/main" id="{CB59BED4-96B0-48B6-9B06-66352069AFF3}"/>
               </a:ext>
             </a:extLst>
           </p:cNvPr>
@@ -13543,7 +13551,7 @@
           <p:cNvPr id="11" name="">
             <a:extLst xmlns:a="http://schemas.openxmlformats.org/drawingml/2006/main">
               <a:ext uri="{FF2B5EF4-FFF2-40B4-BE49-F238E27FC236}">
-                <a16:creationId xmlns:a16="http://schemas.microsoft.com/office/drawing/2014/main" id="{C335329C-E1FA-4AEE-A608-F8EE862ABDA9}"/>
+                <a16:creationId xmlns:a16="http://schemas.microsoft.com/office/drawing/2014/main" id="{7A3653D5-F1BD-4DBA-B742-5FA6EEF66705}"/>
               </a:ext>
             </a:extLst>
           </p:cNvPr>
@@ -13575,7 +13583,7 @@
           <p:cNvPr id="12" name="">
             <a:extLst xmlns:a="http://schemas.openxmlformats.org/drawingml/2006/main">
               <a:ext uri="{FF2B5EF4-FFF2-40B4-BE49-F238E27FC236}">
-                <a16:creationId xmlns:a16="http://schemas.microsoft.com/office/drawing/2014/main" id="{FC86C606-E336-408D-A21C-AC046088BC0C}"/>
+                <a16:creationId xmlns:a16="http://schemas.microsoft.com/office/drawing/2014/main" id="{D9E2ED73-343D-46D6-AC99-92F9563A06A3}"/>
               </a:ext>
             </a:extLst>
           </p:cNvPr>
@@ -13632,7 +13640,7 @@
           <p:cNvPr id="13" name="">
             <a:extLst xmlns:a="http://schemas.openxmlformats.org/drawingml/2006/main">
               <a:ext uri="{FF2B5EF4-FFF2-40B4-BE49-F238E27FC236}">
-                <a16:creationId xmlns:a16="http://schemas.microsoft.com/office/drawing/2014/main" id="{E151B08A-5AD9-46A7-8DCE-53D621AEEA3A}"/>
+                <a16:creationId xmlns:a16="http://schemas.microsoft.com/office/drawing/2014/main" id="{0F482AB3-8176-4ABC-8F21-3000EEAF257F}"/>
               </a:ext>
             </a:extLst>
           </p:cNvPr>
@@ -13689,7 +13697,7 @@
           <p:cNvPr id="14" name="">
             <a:extLst xmlns:a="http://schemas.openxmlformats.org/drawingml/2006/main">
               <a:ext uri="{FF2B5EF4-FFF2-40B4-BE49-F238E27FC236}">
-                <a16:creationId xmlns:a16="http://schemas.microsoft.com/office/drawing/2014/main" id="{E2A9F663-28F5-4FAA-8750-269941EFE5BE}"/>
+                <a16:creationId xmlns:a16="http://schemas.microsoft.com/office/drawing/2014/main" id="{0D59439C-57B5-4935-A54C-B209DC15F177}"/>
               </a:ext>
             </a:extLst>
           </p:cNvPr>
@@ -13723,7 +13731,7 @@
           <p:cNvPr id="15" name="">
             <a:extLst xmlns:a="http://schemas.openxmlformats.org/drawingml/2006/main">
               <a:ext uri="{FF2B5EF4-FFF2-40B4-BE49-F238E27FC236}">
-                <a16:creationId xmlns:a16="http://schemas.microsoft.com/office/drawing/2014/main" id="{5EC23EBE-AA8C-4D20-AD20-96C78C04B94A}"/>
+                <a16:creationId xmlns:a16="http://schemas.microsoft.com/office/drawing/2014/main" id="{1E31DDFC-894A-4EA2-B12E-0B085D7F82E4}"/>
               </a:ext>
             </a:extLst>
           </p:cNvPr>
@@ -13755,7 +13763,7 @@
           <p:cNvPr id="16" name="">
             <a:extLst xmlns:a="http://schemas.openxmlformats.org/drawingml/2006/main">
               <a:ext uri="{FF2B5EF4-FFF2-40B4-BE49-F238E27FC236}">
-                <a16:creationId xmlns:a16="http://schemas.microsoft.com/office/drawing/2014/main" id="{0B081BF2-C099-4F95-9E13-E7603F29C307}"/>
+                <a16:creationId xmlns:a16="http://schemas.microsoft.com/office/drawing/2014/main" id="{69B79538-C58B-46E9-A875-CF3D2F037C10}"/>
               </a:ext>
             </a:extLst>
           </p:cNvPr>
@@ -13812,7 +13820,7 @@
           <p:cNvPr id="17" name="">
             <a:extLst xmlns:a="http://schemas.openxmlformats.org/drawingml/2006/main">
               <a:ext uri="{FF2B5EF4-FFF2-40B4-BE49-F238E27FC236}">
-                <a16:creationId xmlns:a16="http://schemas.microsoft.com/office/drawing/2014/main" id="{D72EC927-52C0-4C32-B932-EF36EBBF589F}"/>
+                <a16:creationId xmlns:a16="http://schemas.microsoft.com/office/drawing/2014/main" id="{F030E67B-8E0E-4EEE-B89E-EDD30D006D11}"/>
               </a:ext>
             </a:extLst>
           </p:cNvPr>
@@ -13869,7 +13877,7 @@
           <p:cNvPr id="18" name="">
             <a:extLst xmlns:a="http://schemas.openxmlformats.org/drawingml/2006/main">
               <a:ext uri="{FF2B5EF4-FFF2-40B4-BE49-F238E27FC236}">
-                <a16:creationId xmlns:a16="http://schemas.microsoft.com/office/drawing/2014/main" id="{A15F9C52-CD53-4191-BFE4-C1A40C68DF9E}"/>
+                <a16:creationId xmlns:a16="http://schemas.microsoft.com/office/drawing/2014/main" id="{041EC58F-CAA1-4448-BBDC-06729D6B59EC}"/>
               </a:ext>
             </a:extLst>
           </p:cNvPr>
@@ -13903,7 +13911,7 @@
           <p:cNvPr id="19" name="">
             <a:extLst xmlns:a="http://schemas.openxmlformats.org/drawingml/2006/main">
               <a:ext uri="{FF2B5EF4-FFF2-40B4-BE49-F238E27FC236}">
-                <a16:creationId xmlns:a16="http://schemas.microsoft.com/office/drawing/2014/main" id="{1E5F636D-5ED6-403B-8622-0F21A89F3B14}"/>
+                <a16:creationId xmlns:a16="http://schemas.microsoft.com/office/drawing/2014/main" id="{8A2EFCD6-6ADC-4ABE-9007-3260FD5521DF}"/>
               </a:ext>
             </a:extLst>
           </p:cNvPr>
@@ -13935,7 +13943,7 @@
           <p:cNvPr id="20" name="">
             <a:extLst xmlns:a="http://schemas.openxmlformats.org/drawingml/2006/main">
               <a:ext uri="{FF2B5EF4-FFF2-40B4-BE49-F238E27FC236}">
-                <a16:creationId xmlns:a16="http://schemas.microsoft.com/office/drawing/2014/main" id="{9CA18D23-0CED-4FFE-858B-AA91A2E04F4B}"/>
+                <a16:creationId xmlns:a16="http://schemas.microsoft.com/office/drawing/2014/main" id="{320C5BA4-32EE-4EE2-825E-908FFBAFB5F3}"/>
               </a:ext>
             </a:extLst>
           </p:cNvPr>
@@ -13992,7 +14000,7 @@
           <p:cNvPr id="21" name="">
             <a:extLst xmlns:a="http://schemas.openxmlformats.org/drawingml/2006/main">
               <a:ext uri="{FF2B5EF4-FFF2-40B4-BE49-F238E27FC236}">
-                <a16:creationId xmlns:a16="http://schemas.microsoft.com/office/drawing/2014/main" id="{89189D4F-03E3-4F5A-9B06-2B7D5DCAF016}"/>
+                <a16:creationId xmlns:a16="http://schemas.microsoft.com/office/drawing/2014/main" id="{F84DB8D6-27E7-4632-B6E9-72AEDB0E30DA}"/>
               </a:ext>
             </a:extLst>
           </p:cNvPr>
@@ -14047,7 +14055,7 @@
     </p:spTree>
     <p:extLst>
       <p:ext uri="{BB962C8B-B14F-4D97-AF65-F5344CB8AC3E}">
-        <p14:creationId xmlns:p14="http://schemas.microsoft.com/office/powerpoint/2010/main" val="255636485"/>
+        <p14:creationId xmlns:p14="http://schemas.microsoft.com/office/powerpoint/2010/main" val="627312823"/>
       </p:ext>
     </p:extLst>
   </p:cSld>
